--- a/deck/Review_Presentation.pptx
+++ b/deck/Review_Presentation.pptx
@@ -5,18 +5,18 @@
     <p:sldMasterId id="2147483648" r:id="rId1"/>
   </p:sldMasterIdLst>
   <p:sldIdLst>
-    <p:sldId id="256" r:id="rId2"/>
-    <p:sldId id="257" r:id="rId3"/>
-    <p:sldId id="258" r:id="rId4"/>
-    <p:sldId id="259" r:id="rId5"/>
-    <p:sldId id="260" r:id="rId6"/>
-    <p:sldId id="261" r:id="rId7"/>
-    <p:sldId id="262" r:id="rId8"/>
-    <p:sldId id="263" r:id="rId9"/>
-    <p:sldId id="264" r:id="rId10"/>
-    <p:sldId id="265" r:id="rId11"/>
+    <p:sldId id="256" r:id="rId7"/>
+    <p:sldId id="257" r:id="rId8"/>
+    <p:sldId id="258" r:id="rId9"/>
+    <p:sldId id="259" r:id="rId10"/>
+    <p:sldId id="260" r:id="rId11"/>
+    <p:sldId id="261" r:id="rId12"/>
+    <p:sldId id="262" r:id="rId13"/>
+    <p:sldId id="263" r:id="rId14"/>
+    <p:sldId id="264" r:id="rId15"/>
+    <p:sldId id="265" r:id="rId16"/>
   </p:sldIdLst>
-  <p:sldSz cx="12192000" cy="6858000"/>
+  <p:sldSz cx="12191695" cy="6858000" type="screen4x3"/>
   <p:notesSz cx="6858000" cy="9144000"/>
   <p:defaultTextStyle>
     <a:defPPr>
@@ -113,22 +113,6 @@
       </a:defRPr>
     </a:lvl9pPr>
   </p:defaultTextStyle>
-  <p:extLst>
-    <p:ext uri="{EFAFB233-063F-42B5-8137-9DF3F51BA10A}">
-      <p15:sldGuideLst xmlns:p15="http://schemas.microsoft.com/office/powerpoint/2012/main">
-        <p15:guide id="1" orient="horz" pos="2160">
-          <p15:clr>
-            <a:srgbClr val="A4A3A4"/>
-          </p15:clr>
-        </p15:guide>
-        <p15:guide id="2" pos="2880">
-          <p15:clr>
-            <a:srgbClr val="A4A3A4"/>
-          </p15:clr>
-        </p15:guide>
-      </p15:sldGuideLst>
-    </p:ext>
-  </p:extLst>
 </p:presentation>
 </file>
 
@@ -170,9 +154,10 @@
           <a:lstStyle/>
           <a:p>
             <a:r>
-              <a:rPr lang="en-US"/>
+              <a:rPr lang="en-US" smtClean="0"/>
               <a:t>Click to edit Master title style</a:t>
             </a:r>
+            <a:endParaRPr lang="en-US"/>
           </a:p>
         </p:txBody>
       </p:sp>
@@ -288,9 +273,10 @@
           </a:lstStyle>
           <a:p>
             <a:r>
-              <a:rPr lang="en-US"/>
+              <a:rPr lang="en-US" smtClean="0"/>
               <a:t>Click to edit Master subtitle style</a:t>
             </a:r>
+            <a:endParaRPr lang="en-US"/>
           </a:p>
         </p:txBody>
       </p:sp>
@@ -311,7 +297,7 @@
           <a:p>
             <a:fld id="{5BCAD085-E8A6-8845-BD4E-CB4CCA059FC4}" type="datetimeFigureOut">
               <a:rPr lang="en-US" smtClean="0"/>
-              <a:t>06-Jul-26</a:t>
+              <a:t>1/27/13</a:t>
             </a:fld>
             <a:endParaRPr lang="en-US"/>
           </a:p>
@@ -405,9 +391,10 @@
           <a:lstStyle/>
           <a:p>
             <a:r>
-              <a:rPr lang="en-US"/>
+              <a:rPr lang="en-US" smtClean="0"/>
               <a:t>Click to edit Master title style</a:t>
             </a:r>
+            <a:endParaRPr lang="en-US"/>
           </a:p>
         </p:txBody>
       </p:sp>
@@ -428,37 +415,38 @@
           <a:p>
             <a:pPr lvl="0"/>
             <a:r>
-              <a:rPr lang="en-US"/>
+              <a:rPr lang="en-US" smtClean="0"/>
               <a:t>Click to edit Master text styles</a:t>
             </a:r>
           </a:p>
           <a:p>
             <a:pPr lvl="1"/>
             <a:r>
-              <a:rPr lang="en-US"/>
+              <a:rPr lang="en-US" smtClean="0"/>
               <a:t>Second level</a:t>
             </a:r>
           </a:p>
           <a:p>
             <a:pPr lvl="2"/>
             <a:r>
-              <a:rPr lang="en-US"/>
+              <a:rPr lang="en-US" smtClean="0"/>
               <a:t>Third level</a:t>
             </a:r>
           </a:p>
           <a:p>
             <a:pPr lvl="3"/>
             <a:r>
-              <a:rPr lang="en-US"/>
+              <a:rPr lang="en-US" smtClean="0"/>
               <a:t>Fourth level</a:t>
             </a:r>
           </a:p>
           <a:p>
             <a:pPr lvl="4"/>
             <a:r>
-              <a:rPr lang="en-US"/>
+              <a:rPr lang="en-US" smtClean="0"/>
               <a:t>Fifth level</a:t>
             </a:r>
+            <a:endParaRPr lang="en-US"/>
           </a:p>
         </p:txBody>
       </p:sp>
@@ -479,7 +467,7 @@
           <a:p>
             <a:fld id="{5BCAD085-E8A6-8845-BD4E-CB4CCA059FC4}" type="datetimeFigureOut">
               <a:rPr lang="en-US" smtClean="0"/>
-              <a:t>06-Jul-26</a:t>
+              <a:t>1/27/13</a:t>
             </a:fld>
             <a:endParaRPr lang="en-US"/>
           </a:p>
@@ -578,9 +566,10 @@
           <a:lstStyle/>
           <a:p>
             <a:r>
-              <a:rPr lang="en-US"/>
+              <a:rPr lang="en-US" smtClean="0"/>
               <a:t>Click to edit Master title style</a:t>
             </a:r>
+            <a:endParaRPr lang="en-US"/>
           </a:p>
         </p:txBody>
       </p:sp>
@@ -606,37 +595,38 @@
           <a:p>
             <a:pPr lvl="0"/>
             <a:r>
-              <a:rPr lang="en-US"/>
+              <a:rPr lang="en-US" smtClean="0"/>
               <a:t>Click to edit Master text styles</a:t>
             </a:r>
           </a:p>
           <a:p>
             <a:pPr lvl="1"/>
             <a:r>
-              <a:rPr lang="en-US"/>
+              <a:rPr lang="en-US" smtClean="0"/>
               <a:t>Second level</a:t>
             </a:r>
           </a:p>
           <a:p>
             <a:pPr lvl="2"/>
             <a:r>
-              <a:rPr lang="en-US"/>
+              <a:rPr lang="en-US" smtClean="0"/>
               <a:t>Third level</a:t>
             </a:r>
           </a:p>
           <a:p>
             <a:pPr lvl="3"/>
             <a:r>
-              <a:rPr lang="en-US"/>
+              <a:rPr lang="en-US" smtClean="0"/>
               <a:t>Fourth level</a:t>
             </a:r>
           </a:p>
           <a:p>
             <a:pPr lvl="4"/>
             <a:r>
-              <a:rPr lang="en-US"/>
+              <a:rPr lang="en-US" smtClean="0"/>
               <a:t>Fifth level</a:t>
             </a:r>
+            <a:endParaRPr lang="en-US"/>
           </a:p>
         </p:txBody>
       </p:sp>
@@ -657,7 +647,7 @@
           <a:p>
             <a:fld id="{5BCAD085-E8A6-8845-BD4E-CB4CCA059FC4}" type="datetimeFigureOut">
               <a:rPr lang="en-US" smtClean="0"/>
-              <a:t>06-Jul-26</a:t>
+              <a:t>1/27/13</a:t>
             </a:fld>
             <a:endParaRPr lang="en-US"/>
           </a:p>
@@ -751,9 +741,10 @@
           <a:lstStyle/>
           <a:p>
             <a:r>
-              <a:rPr lang="en-US"/>
+              <a:rPr lang="en-US" smtClean="0"/>
               <a:t>Click to edit Master title style</a:t>
             </a:r>
+            <a:endParaRPr lang="en-US"/>
           </a:p>
         </p:txBody>
       </p:sp>
@@ -774,37 +765,38 @@
           <a:p>
             <a:pPr lvl="0"/>
             <a:r>
-              <a:rPr lang="en-US"/>
+              <a:rPr lang="en-US" smtClean="0"/>
               <a:t>Click to edit Master text styles</a:t>
             </a:r>
           </a:p>
           <a:p>
             <a:pPr lvl="1"/>
             <a:r>
-              <a:rPr lang="en-US"/>
+              <a:rPr lang="en-US" smtClean="0"/>
               <a:t>Second level</a:t>
             </a:r>
           </a:p>
           <a:p>
             <a:pPr lvl="2"/>
             <a:r>
-              <a:rPr lang="en-US"/>
+              <a:rPr lang="en-US" smtClean="0"/>
               <a:t>Third level</a:t>
             </a:r>
           </a:p>
           <a:p>
             <a:pPr lvl="3"/>
             <a:r>
-              <a:rPr lang="en-US"/>
+              <a:rPr lang="en-US" smtClean="0"/>
               <a:t>Fourth level</a:t>
             </a:r>
           </a:p>
           <a:p>
             <a:pPr lvl="4"/>
             <a:r>
-              <a:rPr lang="en-US"/>
+              <a:rPr lang="en-US" smtClean="0"/>
               <a:t>Fifth level</a:t>
             </a:r>
+            <a:endParaRPr lang="en-US"/>
           </a:p>
         </p:txBody>
       </p:sp>
@@ -825,7 +817,7 @@
           <a:p>
             <a:fld id="{5BCAD085-E8A6-8845-BD4E-CB4CCA059FC4}" type="datetimeFigureOut">
               <a:rPr lang="en-US" smtClean="0"/>
-              <a:t>06-Jul-26</a:t>
+              <a:t>1/27/13</a:t>
             </a:fld>
             <a:endParaRPr lang="en-US"/>
           </a:p>
@@ -928,9 +920,10 @@
           </a:lstStyle>
           <a:p>
             <a:r>
-              <a:rPr lang="en-US"/>
+              <a:rPr lang="en-US" smtClean="0"/>
               <a:t>Click to edit Master title style</a:t>
             </a:r>
+            <a:endParaRPr lang="en-US"/>
           </a:p>
         </p:txBody>
       </p:sp>
@@ -1047,7 +1040,7 @@
           <a:p>
             <a:pPr lvl="0"/>
             <a:r>
-              <a:rPr lang="en-US"/>
+              <a:rPr lang="en-US" smtClean="0"/>
               <a:t>Click to edit Master text styles</a:t>
             </a:r>
           </a:p>
@@ -1070,7 +1063,7 @@
           <a:p>
             <a:fld id="{5BCAD085-E8A6-8845-BD4E-CB4CCA059FC4}" type="datetimeFigureOut">
               <a:rPr lang="en-US" smtClean="0"/>
-              <a:t>06-Jul-26</a:t>
+              <a:t>1/27/13</a:t>
             </a:fld>
             <a:endParaRPr lang="en-US"/>
           </a:p>
@@ -1164,9 +1157,10 @@
           <a:lstStyle/>
           <a:p>
             <a:r>
-              <a:rPr lang="en-US"/>
+              <a:rPr lang="en-US" smtClean="0"/>
               <a:t>Click to edit Master title style</a:t>
             </a:r>
+            <a:endParaRPr lang="en-US"/>
           </a:p>
         </p:txBody>
       </p:sp>
@@ -1220,37 +1214,38 @@
           <a:p>
             <a:pPr lvl="0"/>
             <a:r>
-              <a:rPr lang="en-US"/>
+              <a:rPr lang="en-US" smtClean="0"/>
               <a:t>Click to edit Master text styles</a:t>
             </a:r>
           </a:p>
           <a:p>
             <a:pPr lvl="1"/>
             <a:r>
-              <a:rPr lang="en-US"/>
+              <a:rPr lang="en-US" smtClean="0"/>
               <a:t>Second level</a:t>
             </a:r>
           </a:p>
           <a:p>
             <a:pPr lvl="2"/>
             <a:r>
-              <a:rPr lang="en-US"/>
+              <a:rPr lang="en-US" smtClean="0"/>
               <a:t>Third level</a:t>
             </a:r>
           </a:p>
           <a:p>
             <a:pPr lvl="3"/>
             <a:r>
-              <a:rPr lang="en-US"/>
+              <a:rPr lang="en-US" smtClean="0"/>
               <a:t>Fourth level</a:t>
             </a:r>
           </a:p>
           <a:p>
             <a:pPr lvl="4"/>
             <a:r>
-              <a:rPr lang="en-US"/>
+              <a:rPr lang="en-US" smtClean="0"/>
               <a:t>Fifth level</a:t>
             </a:r>
+            <a:endParaRPr lang="en-US"/>
           </a:p>
         </p:txBody>
       </p:sp>
@@ -1304,37 +1299,38 @@
           <a:p>
             <a:pPr lvl="0"/>
             <a:r>
-              <a:rPr lang="en-US"/>
+              <a:rPr lang="en-US" smtClean="0"/>
               <a:t>Click to edit Master text styles</a:t>
             </a:r>
           </a:p>
           <a:p>
             <a:pPr lvl="1"/>
             <a:r>
-              <a:rPr lang="en-US"/>
+              <a:rPr lang="en-US" smtClean="0"/>
               <a:t>Second level</a:t>
             </a:r>
           </a:p>
           <a:p>
             <a:pPr lvl="2"/>
             <a:r>
-              <a:rPr lang="en-US"/>
+              <a:rPr lang="en-US" smtClean="0"/>
               <a:t>Third level</a:t>
             </a:r>
           </a:p>
           <a:p>
             <a:pPr lvl="3"/>
             <a:r>
-              <a:rPr lang="en-US"/>
+              <a:rPr lang="en-US" smtClean="0"/>
               <a:t>Fourth level</a:t>
             </a:r>
           </a:p>
           <a:p>
             <a:pPr lvl="4"/>
             <a:r>
-              <a:rPr lang="en-US"/>
+              <a:rPr lang="en-US" smtClean="0"/>
               <a:t>Fifth level</a:t>
             </a:r>
+            <a:endParaRPr lang="en-US"/>
           </a:p>
         </p:txBody>
       </p:sp>
@@ -1355,7 +1351,7 @@
           <a:p>
             <a:fld id="{5BCAD085-E8A6-8845-BD4E-CB4CCA059FC4}" type="datetimeFigureOut">
               <a:rPr lang="en-US" smtClean="0"/>
-              <a:t>06-Jul-26</a:t>
+              <a:t>1/27/13</a:t>
             </a:fld>
             <a:endParaRPr lang="en-US"/>
           </a:p>
@@ -1453,9 +1449,10 @@
           </a:lstStyle>
           <a:p>
             <a:r>
-              <a:rPr lang="en-US"/>
+              <a:rPr lang="en-US" smtClean="0"/>
               <a:t>Click to edit Master title style</a:t>
             </a:r>
+            <a:endParaRPr lang="en-US"/>
           </a:p>
         </p:txBody>
       </p:sp>
@@ -1518,7 +1515,7 @@
           <a:p>
             <a:pPr lvl="0"/>
             <a:r>
-              <a:rPr lang="en-US"/>
+              <a:rPr lang="en-US" smtClean="0"/>
               <a:t>Click to edit Master text styles</a:t>
             </a:r>
           </a:p>
@@ -1574,37 +1571,38 @@
           <a:p>
             <a:pPr lvl="0"/>
             <a:r>
-              <a:rPr lang="en-US"/>
+              <a:rPr lang="en-US" smtClean="0"/>
               <a:t>Click to edit Master text styles</a:t>
             </a:r>
           </a:p>
           <a:p>
             <a:pPr lvl="1"/>
             <a:r>
-              <a:rPr lang="en-US"/>
+              <a:rPr lang="en-US" smtClean="0"/>
               <a:t>Second level</a:t>
             </a:r>
           </a:p>
           <a:p>
             <a:pPr lvl="2"/>
             <a:r>
-              <a:rPr lang="en-US"/>
+              <a:rPr lang="en-US" smtClean="0"/>
               <a:t>Third level</a:t>
             </a:r>
           </a:p>
           <a:p>
             <a:pPr lvl="3"/>
             <a:r>
-              <a:rPr lang="en-US"/>
+              <a:rPr lang="en-US" smtClean="0"/>
               <a:t>Fourth level</a:t>
             </a:r>
           </a:p>
           <a:p>
             <a:pPr lvl="4"/>
             <a:r>
-              <a:rPr lang="en-US"/>
+              <a:rPr lang="en-US" smtClean="0"/>
               <a:t>Fifth level</a:t>
             </a:r>
+            <a:endParaRPr lang="en-US"/>
           </a:p>
         </p:txBody>
       </p:sp>
@@ -1667,7 +1665,7 @@
           <a:p>
             <a:pPr lvl="0"/>
             <a:r>
-              <a:rPr lang="en-US"/>
+              <a:rPr lang="en-US" smtClean="0"/>
               <a:t>Click to edit Master text styles</a:t>
             </a:r>
           </a:p>
@@ -1723,37 +1721,38 @@
           <a:p>
             <a:pPr lvl="0"/>
             <a:r>
-              <a:rPr lang="en-US"/>
+              <a:rPr lang="en-US" smtClean="0"/>
               <a:t>Click to edit Master text styles</a:t>
             </a:r>
           </a:p>
           <a:p>
             <a:pPr lvl="1"/>
             <a:r>
-              <a:rPr lang="en-US"/>
+              <a:rPr lang="en-US" smtClean="0"/>
               <a:t>Second level</a:t>
             </a:r>
           </a:p>
           <a:p>
             <a:pPr lvl="2"/>
             <a:r>
-              <a:rPr lang="en-US"/>
+              <a:rPr lang="en-US" smtClean="0"/>
               <a:t>Third level</a:t>
             </a:r>
           </a:p>
           <a:p>
             <a:pPr lvl="3"/>
             <a:r>
-              <a:rPr lang="en-US"/>
+              <a:rPr lang="en-US" smtClean="0"/>
               <a:t>Fourth level</a:t>
             </a:r>
           </a:p>
           <a:p>
             <a:pPr lvl="4"/>
             <a:r>
-              <a:rPr lang="en-US"/>
+              <a:rPr lang="en-US" smtClean="0"/>
               <a:t>Fifth level</a:t>
             </a:r>
+            <a:endParaRPr lang="en-US"/>
           </a:p>
         </p:txBody>
       </p:sp>
@@ -1774,7 +1773,7 @@
           <a:p>
             <a:fld id="{5BCAD085-E8A6-8845-BD4E-CB4CCA059FC4}" type="datetimeFigureOut">
               <a:rPr lang="en-US" smtClean="0"/>
-              <a:t>06-Jul-26</a:t>
+              <a:t>1/27/13</a:t>
             </a:fld>
             <a:endParaRPr lang="en-US"/>
           </a:p>
@@ -1868,9 +1867,10 @@
           <a:lstStyle/>
           <a:p>
             <a:r>
-              <a:rPr lang="en-US"/>
+              <a:rPr lang="en-US" smtClean="0"/>
               <a:t>Click to edit Master title style</a:t>
             </a:r>
+            <a:endParaRPr lang="en-US"/>
           </a:p>
         </p:txBody>
       </p:sp>
@@ -1891,7 +1891,7 @@
           <a:p>
             <a:fld id="{5BCAD085-E8A6-8845-BD4E-CB4CCA059FC4}" type="datetimeFigureOut">
               <a:rPr lang="en-US" smtClean="0"/>
-              <a:t>06-Jul-26</a:t>
+              <a:t>1/27/13</a:t>
             </a:fld>
             <a:endParaRPr lang="en-US"/>
           </a:p>
@@ -1986,7 +1986,7 @@
           <a:p>
             <a:fld id="{5BCAD085-E8A6-8845-BD4E-CB4CCA059FC4}" type="datetimeFigureOut">
               <a:rPr lang="en-US" smtClean="0"/>
-              <a:t>06-Jul-26</a:t>
+              <a:t>1/27/13</a:t>
             </a:fld>
             <a:endParaRPr lang="en-US"/>
           </a:p>
@@ -2089,9 +2089,10 @@
           </a:lstStyle>
           <a:p>
             <a:r>
-              <a:rPr lang="en-US"/>
+              <a:rPr lang="en-US" smtClean="0"/>
               <a:t>Click to edit Master title style</a:t>
             </a:r>
+            <a:endParaRPr lang="en-US"/>
           </a:p>
         </p:txBody>
       </p:sp>
@@ -2145,37 +2146,38 @@
           <a:p>
             <a:pPr lvl="0"/>
             <a:r>
-              <a:rPr lang="en-US"/>
+              <a:rPr lang="en-US" smtClean="0"/>
               <a:t>Click to edit Master text styles</a:t>
             </a:r>
           </a:p>
           <a:p>
             <a:pPr lvl="1"/>
             <a:r>
-              <a:rPr lang="en-US"/>
+              <a:rPr lang="en-US" smtClean="0"/>
               <a:t>Second level</a:t>
             </a:r>
           </a:p>
           <a:p>
             <a:pPr lvl="2"/>
             <a:r>
-              <a:rPr lang="en-US"/>
+              <a:rPr lang="en-US" smtClean="0"/>
               <a:t>Third level</a:t>
             </a:r>
           </a:p>
           <a:p>
             <a:pPr lvl="3"/>
             <a:r>
-              <a:rPr lang="en-US"/>
+              <a:rPr lang="en-US" smtClean="0"/>
               <a:t>Fourth level</a:t>
             </a:r>
           </a:p>
           <a:p>
             <a:pPr lvl="4"/>
             <a:r>
-              <a:rPr lang="en-US"/>
+              <a:rPr lang="en-US" smtClean="0"/>
               <a:t>Fifth level</a:t>
             </a:r>
+            <a:endParaRPr lang="en-US"/>
           </a:p>
         </p:txBody>
       </p:sp>
@@ -2238,7 +2240,7 @@
           <a:p>
             <a:pPr lvl="0"/>
             <a:r>
-              <a:rPr lang="en-US"/>
+              <a:rPr lang="en-US" smtClean="0"/>
               <a:t>Click to edit Master text styles</a:t>
             </a:r>
           </a:p>
@@ -2261,7 +2263,7 @@
           <a:p>
             <a:fld id="{5BCAD085-E8A6-8845-BD4E-CB4CCA059FC4}" type="datetimeFigureOut">
               <a:rPr lang="en-US" smtClean="0"/>
-              <a:t>06-Jul-26</a:t>
+              <a:t>1/27/13</a:t>
             </a:fld>
             <a:endParaRPr lang="en-US"/>
           </a:p>
@@ -2364,9 +2366,10 @@
           </a:lstStyle>
           <a:p>
             <a:r>
-              <a:rPr lang="en-US"/>
+              <a:rPr lang="en-US" smtClean="0"/>
               <a:t>Click to edit Master title style</a:t>
             </a:r>
+            <a:endParaRPr lang="en-US"/>
           </a:p>
         </p:txBody>
       </p:sp>
@@ -2490,7 +2493,7 @@
           <a:p>
             <a:pPr lvl="0"/>
             <a:r>
-              <a:rPr lang="en-US"/>
+              <a:rPr lang="en-US" smtClean="0"/>
               <a:t>Click to edit Master text styles</a:t>
             </a:r>
           </a:p>
@@ -2513,7 +2516,7 @@
           <a:p>
             <a:fld id="{5BCAD085-E8A6-8845-BD4E-CB4CCA059FC4}" type="datetimeFigureOut">
               <a:rPr lang="en-US" smtClean="0"/>
-              <a:t>06-Jul-26</a:t>
+              <a:t>1/27/13</a:t>
             </a:fld>
             <a:endParaRPr lang="en-US"/>
           </a:p>
@@ -2622,9 +2625,10 @@
           <a:lstStyle/>
           <a:p>
             <a:r>
-              <a:rPr lang="en-US"/>
+              <a:rPr lang="en-US" smtClean="0"/>
               <a:t>Click to edit Master title style</a:t>
             </a:r>
+            <a:endParaRPr lang="en-US"/>
           </a:p>
         </p:txBody>
       </p:sp>
@@ -2655,37 +2659,38 @@
           <a:p>
             <a:pPr lvl="0"/>
             <a:r>
-              <a:rPr lang="en-US"/>
+              <a:rPr lang="en-US" smtClean="0"/>
               <a:t>Click to edit Master text styles</a:t>
             </a:r>
           </a:p>
           <a:p>
             <a:pPr lvl="1"/>
             <a:r>
-              <a:rPr lang="en-US"/>
+              <a:rPr lang="en-US" smtClean="0"/>
               <a:t>Second level</a:t>
             </a:r>
           </a:p>
           <a:p>
             <a:pPr lvl="2"/>
             <a:r>
-              <a:rPr lang="en-US"/>
+              <a:rPr lang="en-US" smtClean="0"/>
               <a:t>Third level</a:t>
             </a:r>
           </a:p>
           <a:p>
             <a:pPr lvl="3"/>
             <a:r>
-              <a:rPr lang="en-US"/>
+              <a:rPr lang="en-US" smtClean="0"/>
               <a:t>Fourth level</a:t>
             </a:r>
           </a:p>
           <a:p>
             <a:pPr lvl="4"/>
             <a:r>
-              <a:rPr lang="en-US"/>
+              <a:rPr lang="en-US" smtClean="0"/>
               <a:t>Fifth level</a:t>
             </a:r>
+            <a:endParaRPr lang="en-US"/>
           </a:p>
         </p:txBody>
       </p:sp>
@@ -2724,7 +2729,7 @@
           <a:p>
             <a:fld id="{5BCAD085-E8A6-8845-BD4E-CB4CCA059FC4}" type="datetimeFigureOut">
               <a:rPr lang="en-US" smtClean="0"/>
-              <a:t>06-Jul-26</a:t>
+              <a:t>1/27/13</a:t>
             </a:fld>
             <a:endParaRPr lang="en-US"/>
           </a:p>
@@ -3083,7 +3088,7 @@
 </file>
 
 <file path=ppt/slides/slide1.xml><?xml version="1.0" encoding="utf-8"?>
-<p:sld xmlns:a="http://schemas.openxmlformats.org/drawingml/2006/main" xmlns:r="http://schemas.openxmlformats.org/officeDocument/2006/relationships" xmlns:p="http://schemas.openxmlformats.org/presentationml/2006/main">
+<p:sld xmlns:a="http://schemas.openxmlformats.org/drawingml/2006/main" xmlns:p="http://schemas.openxmlformats.org/presentationml/2006/main" xmlns:r="http://schemas.openxmlformats.org/officeDocument/2006/relationships">
   <p:cSld>
     <p:spTree>
       <p:nvGrpSpPr>
@@ -3091,14 +3096,7 @@
         <p:cNvGrpSpPr/>
         <p:nvPr/>
       </p:nvGrpSpPr>
-      <p:grpSpPr>
-        <a:xfrm>
-          <a:off x="0" y="0"/>
-          <a:ext cx="0" cy="0"/>
-          <a:chOff x="0" y="0"/>
-          <a:chExt cx="0" cy="0"/>
-        </a:xfrm>
-      </p:grpSpPr>
+      <p:grpSpPr/>
       <p:sp>
         <p:nvSpPr>
           <p:cNvPr id="2" name="Rectangle 1"/>
@@ -3140,7 +3138,6 @@
           <a:lstStyle/>
           <a:p>
             <a:pPr algn="ctr"/>
-            <a:endParaRPr/>
           </a:p>
         </p:txBody>
       </p:sp>
@@ -3185,7 +3182,6 @@
           <a:lstStyle/>
           <a:p>
             <a:pPr algn="ctr"/>
-            <a:endParaRPr/>
           </a:p>
         </p:txBody>
       </p:sp>
@@ -3198,7 +3194,7 @@
         <p:spPr>
           <a:xfrm>
             <a:off x="640080" y="868680"/>
-            <a:ext cx="3456524" cy="276999"/>
+            <a:ext cx="10789920" cy="365760"/>
           </a:xfrm>
           <a:prstGeom prst="rect">
             <a:avLst/>
@@ -3218,7 +3214,7 @@
                 </a:solidFill>
                 <a:latin typeface="Calibri"/>
               </a:rPr>
-              <a:t>IIITDM-SIES INTERNSHIP  |  REVIEW PRESENTATION</a:t>
+              <a:t>IIITDM-SIES INTERNSHIP  |  MID-REVIEW PRESENTATION</a:t>
             </a:r>
           </a:p>
         </p:txBody>
@@ -3335,7 +3331,6 @@
           <a:lstStyle/>
           <a:p>
             <a:pPr algn="ctr"/>
-            <a:endParaRPr/>
           </a:p>
         </p:txBody>
       </p:sp>
@@ -3360,9 +3355,7 @@
             <a:spAutoFit/>
           </a:bodyPr>
           <a:lstStyle/>
-          <a:p>
-            <a:endParaRPr/>
-          </a:p>
+          <a:p/>
           <a:p>
             <a:pPr>
               <a:spcAft>
@@ -3508,7 +3501,7 @@
 </file>
 
 <file path=ppt/slides/slide10.xml><?xml version="1.0" encoding="utf-8"?>
-<p:sld xmlns:a="http://schemas.openxmlformats.org/drawingml/2006/main" xmlns:r="http://schemas.openxmlformats.org/officeDocument/2006/relationships" xmlns:p="http://schemas.openxmlformats.org/presentationml/2006/main">
+<p:sld xmlns:a="http://schemas.openxmlformats.org/drawingml/2006/main" xmlns:p="http://schemas.openxmlformats.org/presentationml/2006/main" xmlns:r="http://schemas.openxmlformats.org/officeDocument/2006/relationships">
   <p:cSld>
     <p:spTree>
       <p:nvGrpSpPr>
@@ -3516,14 +3509,7 @@
         <p:cNvGrpSpPr/>
         <p:nvPr/>
       </p:nvGrpSpPr>
-      <p:grpSpPr>
-        <a:xfrm>
-          <a:off x="0" y="0"/>
-          <a:ext cx="0" cy="0"/>
-          <a:chOff x="0" y="0"/>
-          <a:chExt cx="0" cy="0"/>
-        </a:xfrm>
-      </p:grpSpPr>
+      <p:grpSpPr/>
       <p:sp>
         <p:nvSpPr>
           <p:cNvPr id="2" name="Rectangle 1"/>
@@ -3565,7 +3551,6 @@
           <a:lstStyle/>
           <a:p>
             <a:pPr algn="ctr"/>
-            <a:endParaRPr/>
           </a:p>
         </p:txBody>
       </p:sp>
@@ -3610,7 +3595,6 @@
           <a:lstStyle/>
           <a:p>
             <a:pPr algn="ctr"/>
-            <a:endParaRPr/>
           </a:p>
         </p:txBody>
       </p:sp>
@@ -4066,7 +4050,6 @@
           <a:lstStyle/>
           <a:p>
             <a:pPr algn="ctr"/>
-            <a:endParaRPr/>
           </a:p>
         </p:txBody>
       </p:sp>
@@ -4183,7 +4166,7 @@
 </file>
 
 <file path=ppt/slides/slide2.xml><?xml version="1.0" encoding="utf-8"?>
-<p:sld xmlns:a="http://schemas.openxmlformats.org/drawingml/2006/main" xmlns:r="http://schemas.openxmlformats.org/officeDocument/2006/relationships" xmlns:p="http://schemas.openxmlformats.org/presentationml/2006/main">
+<p:sld xmlns:a="http://schemas.openxmlformats.org/drawingml/2006/main" xmlns:p="http://schemas.openxmlformats.org/presentationml/2006/main" xmlns:r="http://schemas.openxmlformats.org/officeDocument/2006/relationships">
   <p:cSld>
     <p:spTree>
       <p:nvGrpSpPr>
@@ -4191,14 +4174,7 @@
         <p:cNvGrpSpPr/>
         <p:nvPr/>
       </p:nvGrpSpPr>
-      <p:grpSpPr>
-        <a:xfrm>
-          <a:off x="0" y="0"/>
-          <a:ext cx="0" cy="0"/>
-          <a:chOff x="0" y="0"/>
-          <a:chExt cx="0" cy="0"/>
-        </a:xfrm>
-      </p:grpSpPr>
+      <p:grpSpPr/>
       <p:sp>
         <p:nvSpPr>
           <p:cNvPr id="2" name="Rectangle 1"/>
@@ -4240,7 +4216,6 @@
           <a:lstStyle/>
           <a:p>
             <a:pPr algn="ctr"/>
-            <a:endParaRPr/>
           </a:p>
         </p:txBody>
       </p:sp>
@@ -4285,7 +4260,6 @@
           <a:lstStyle/>
           <a:p>
             <a:pPr algn="ctr"/>
-            <a:endParaRPr/>
           </a:p>
         </p:txBody>
       </p:sp>
@@ -4593,7 +4567,7 @@
 </file>
 
 <file path=ppt/slides/slide3.xml><?xml version="1.0" encoding="utf-8"?>
-<p:sld xmlns:a="http://schemas.openxmlformats.org/drawingml/2006/main" xmlns:r="http://schemas.openxmlformats.org/officeDocument/2006/relationships" xmlns:p="http://schemas.openxmlformats.org/presentationml/2006/main">
+<p:sld xmlns:a="http://schemas.openxmlformats.org/drawingml/2006/main" xmlns:p="http://schemas.openxmlformats.org/presentationml/2006/main" xmlns:r="http://schemas.openxmlformats.org/officeDocument/2006/relationships">
   <p:cSld>
     <p:spTree>
       <p:nvGrpSpPr>
@@ -4601,14 +4575,7 @@
         <p:cNvGrpSpPr/>
         <p:nvPr/>
       </p:nvGrpSpPr>
-      <p:grpSpPr>
-        <a:xfrm>
-          <a:off x="0" y="0"/>
-          <a:ext cx="0" cy="0"/>
-          <a:chOff x="0" y="0"/>
-          <a:chExt cx="0" cy="0"/>
-        </a:xfrm>
-      </p:grpSpPr>
+      <p:grpSpPr/>
       <p:sp>
         <p:nvSpPr>
           <p:cNvPr id="2" name="Rectangle 1"/>
@@ -4650,7 +4617,6 @@
           <a:lstStyle/>
           <a:p>
             <a:pPr algn="ctr"/>
-            <a:endParaRPr/>
           </a:p>
         </p:txBody>
       </p:sp>
@@ -4695,7 +4661,6 @@
           <a:lstStyle/>
           <a:p>
             <a:pPr algn="ctr"/>
-            <a:endParaRPr/>
           </a:p>
         </p:txBody>
       </p:sp>
@@ -5042,7 +5007,7 @@
 </file>
 
 <file path=ppt/slides/slide4.xml><?xml version="1.0" encoding="utf-8"?>
-<p:sld xmlns:a="http://schemas.openxmlformats.org/drawingml/2006/main" xmlns:r="http://schemas.openxmlformats.org/officeDocument/2006/relationships" xmlns:p="http://schemas.openxmlformats.org/presentationml/2006/main">
+<p:sld xmlns:a="http://schemas.openxmlformats.org/drawingml/2006/main" xmlns:p="http://schemas.openxmlformats.org/presentationml/2006/main" xmlns:r="http://schemas.openxmlformats.org/officeDocument/2006/relationships">
   <p:cSld>
     <p:spTree>
       <p:nvGrpSpPr>
@@ -5050,14 +5015,7 @@
         <p:cNvGrpSpPr/>
         <p:nvPr/>
       </p:nvGrpSpPr>
-      <p:grpSpPr>
-        <a:xfrm>
-          <a:off x="0" y="0"/>
-          <a:ext cx="0" cy="0"/>
-          <a:chOff x="0" y="0"/>
-          <a:chExt cx="0" cy="0"/>
-        </a:xfrm>
-      </p:grpSpPr>
+      <p:grpSpPr/>
       <p:sp>
         <p:nvSpPr>
           <p:cNvPr id="2" name="Rectangle 1"/>
@@ -5099,7 +5057,6 @@
           <a:lstStyle/>
           <a:p>
             <a:pPr algn="ctr"/>
-            <a:endParaRPr/>
           </a:p>
         </p:txBody>
       </p:sp>
@@ -5144,7 +5101,6 @@
           <a:lstStyle/>
           <a:p>
             <a:pPr algn="ctr"/>
-            <a:endParaRPr/>
           </a:p>
         </p:txBody>
       </p:sp>
@@ -5259,7 +5215,6 @@
           <a:lstStyle/>
           <a:p>
             <a:pPr algn="ctr"/>
-            <a:endParaRPr/>
           </a:p>
         </p:txBody>
       </p:sp>
@@ -5599,7 +5554,6 @@
           <a:lstStyle/>
           <a:p>
             <a:pPr algn="ctr"/>
-            <a:endParaRPr/>
           </a:p>
         </p:txBody>
       </p:sp>
@@ -5939,7 +5893,7 @@
 </file>
 
 <file path=ppt/slides/slide5.xml><?xml version="1.0" encoding="utf-8"?>
-<p:sld xmlns:a="http://schemas.openxmlformats.org/drawingml/2006/main" xmlns:r="http://schemas.openxmlformats.org/officeDocument/2006/relationships" xmlns:p="http://schemas.openxmlformats.org/presentationml/2006/main">
+<p:sld xmlns:a="http://schemas.openxmlformats.org/drawingml/2006/main" xmlns:p="http://schemas.openxmlformats.org/presentationml/2006/main" xmlns:r="http://schemas.openxmlformats.org/officeDocument/2006/relationships">
   <p:cSld>
     <p:spTree>
       <p:nvGrpSpPr>
@@ -5947,14 +5901,7 @@
         <p:cNvGrpSpPr/>
         <p:nvPr/>
       </p:nvGrpSpPr>
-      <p:grpSpPr>
-        <a:xfrm>
-          <a:off x="0" y="0"/>
-          <a:ext cx="0" cy="0"/>
-          <a:chOff x="0" y="0"/>
-          <a:chExt cx="0" cy="0"/>
-        </a:xfrm>
-      </p:grpSpPr>
+      <p:grpSpPr/>
       <p:sp>
         <p:nvSpPr>
           <p:cNvPr id="2" name="Rectangle 1"/>
@@ -5996,7 +5943,6 @@
           <a:lstStyle/>
           <a:p>
             <a:pPr algn="ctr"/>
-            <a:endParaRPr/>
           </a:p>
         </p:txBody>
       </p:sp>
@@ -6041,7 +5987,6 @@
           <a:lstStyle/>
           <a:p>
             <a:pPr algn="ctr"/>
-            <a:endParaRPr/>
           </a:p>
         </p:txBody>
       </p:sp>
@@ -6132,48 +6077,12 @@
                 <a:tableStyleId>{5C22544A-7EE6-4342-B048-85BDC9FD1C3A}</a:tableStyleId>
               </a:tblPr>
               <a:tblGrid>
-                <a:gridCol w="1798320">
-                  <a:extLst>
-                    <a:ext uri="{9D8B030D-6E8A-4147-A177-3AD203B41FA5}">
-                      <a16:colId xmlns:a16="http://schemas.microsoft.com/office/drawing/2014/main" val="20000"/>
-                    </a:ext>
-                  </a:extLst>
-                </a:gridCol>
-                <a:gridCol w="1798320">
-                  <a:extLst>
-                    <a:ext uri="{9D8B030D-6E8A-4147-A177-3AD203B41FA5}">
-                      <a16:colId xmlns:a16="http://schemas.microsoft.com/office/drawing/2014/main" val="20001"/>
-                    </a:ext>
-                  </a:extLst>
-                </a:gridCol>
-                <a:gridCol w="1798320">
-                  <a:extLst>
-                    <a:ext uri="{9D8B030D-6E8A-4147-A177-3AD203B41FA5}">
-                      <a16:colId xmlns:a16="http://schemas.microsoft.com/office/drawing/2014/main" val="20002"/>
-                    </a:ext>
-                  </a:extLst>
-                </a:gridCol>
-                <a:gridCol w="1798320">
-                  <a:extLst>
-                    <a:ext uri="{9D8B030D-6E8A-4147-A177-3AD203B41FA5}">
-                      <a16:colId xmlns:a16="http://schemas.microsoft.com/office/drawing/2014/main" val="20003"/>
-                    </a:ext>
-                  </a:extLst>
-                </a:gridCol>
-                <a:gridCol w="1798320">
-                  <a:extLst>
-                    <a:ext uri="{9D8B030D-6E8A-4147-A177-3AD203B41FA5}">
-                      <a16:colId xmlns:a16="http://schemas.microsoft.com/office/drawing/2014/main" val="20004"/>
-                    </a:ext>
-                  </a:extLst>
-                </a:gridCol>
-                <a:gridCol w="1798320">
-                  <a:extLst>
-                    <a:ext uri="{9D8B030D-6E8A-4147-A177-3AD203B41FA5}">
-                      <a16:colId xmlns:a16="http://schemas.microsoft.com/office/drawing/2014/main" val="20005"/>
-                    </a:ext>
-                  </a:extLst>
-                </a:gridCol>
+                <a:gridCol w="1798320"/>
+                <a:gridCol w="1798320"/>
+                <a:gridCol w="1798320"/>
+                <a:gridCol w="1798320"/>
+                <a:gridCol w="1798320"/>
+                <a:gridCol w="1798320"/>
               </a:tblGrid>
               <a:tr h="457200">
                 <a:tc>
@@ -6314,11 +6223,6 @@
                     </a:solidFill>
                   </a:tcPr>
                 </a:tc>
-                <a:extLst>
-                  <a:ext uri="{0D108BD9-81ED-4DB2-BD59-A6C34878D82A}">
-                    <a16:rowId xmlns:a16="http://schemas.microsoft.com/office/drawing/2014/main" val="10000"/>
-                  </a:ext>
-                </a:extLst>
               </a:tr>
               <a:tr h="457200">
                 <a:tc>
@@ -6459,11 +6363,6 @@
                     </a:solidFill>
                   </a:tcPr>
                 </a:tc>
-                <a:extLst>
-                  <a:ext uri="{0D108BD9-81ED-4DB2-BD59-A6C34878D82A}">
-                    <a16:rowId xmlns:a16="http://schemas.microsoft.com/office/drawing/2014/main" val="10001"/>
-                  </a:ext>
-                </a:extLst>
               </a:tr>
               <a:tr h="457200">
                 <a:tc>
@@ -6604,11 +6503,6 @@
                     </a:solidFill>
                   </a:tcPr>
                 </a:tc>
-                <a:extLst>
-                  <a:ext uri="{0D108BD9-81ED-4DB2-BD59-A6C34878D82A}">
-                    <a16:rowId xmlns:a16="http://schemas.microsoft.com/office/drawing/2014/main" val="10002"/>
-                  </a:ext>
-                </a:extLst>
               </a:tr>
               <a:tr h="457200">
                 <a:tc>
@@ -6749,11 +6643,6 @@
                     </a:solidFill>
                   </a:tcPr>
                 </a:tc>
-                <a:extLst>
-                  <a:ext uri="{0D108BD9-81ED-4DB2-BD59-A6C34878D82A}">
-                    <a16:rowId xmlns:a16="http://schemas.microsoft.com/office/drawing/2014/main" val="10003"/>
-                  </a:ext>
-                </a:extLst>
               </a:tr>
               <a:tr h="457200">
                 <a:tc>
@@ -6894,11 +6783,6 @@
                     </a:solidFill>
                   </a:tcPr>
                 </a:tc>
-                <a:extLst>
-                  <a:ext uri="{0D108BD9-81ED-4DB2-BD59-A6C34878D82A}">
-                    <a16:rowId xmlns:a16="http://schemas.microsoft.com/office/drawing/2014/main" val="10004"/>
-                  </a:ext>
-                </a:extLst>
               </a:tr>
               <a:tr h="457200">
                 <a:tc>
@@ -7039,11 +6923,6 @@
                     </a:solidFill>
                   </a:tcPr>
                 </a:tc>
-                <a:extLst>
-                  <a:ext uri="{0D108BD9-81ED-4DB2-BD59-A6C34878D82A}">
-                    <a16:rowId xmlns:a16="http://schemas.microsoft.com/office/drawing/2014/main" val="10005"/>
-                  </a:ext>
-                </a:extLst>
               </a:tr>
               <a:tr h="457200">
                 <a:tc>
@@ -7184,11 +7063,6 @@
                     </a:solidFill>
                   </a:tcPr>
                 </a:tc>
-                <a:extLst>
-                  <a:ext uri="{0D108BD9-81ED-4DB2-BD59-A6C34878D82A}">
-                    <a16:rowId xmlns:a16="http://schemas.microsoft.com/office/drawing/2014/main" val="10006"/>
-                  </a:ext>
-                </a:extLst>
               </a:tr>
             </a:tbl>
           </a:graphicData>
@@ -7272,7 +7146,7 @@
 </file>
 
 <file path=ppt/slides/slide6.xml><?xml version="1.0" encoding="utf-8"?>
-<p:sld xmlns:a="http://schemas.openxmlformats.org/drawingml/2006/main" xmlns:r="http://schemas.openxmlformats.org/officeDocument/2006/relationships" xmlns:p="http://schemas.openxmlformats.org/presentationml/2006/main">
+<p:sld xmlns:a="http://schemas.openxmlformats.org/drawingml/2006/main" xmlns:p="http://schemas.openxmlformats.org/presentationml/2006/main" xmlns:r="http://schemas.openxmlformats.org/officeDocument/2006/relationships">
   <p:cSld>
     <p:spTree>
       <p:nvGrpSpPr>
@@ -7280,14 +7154,7 @@
         <p:cNvGrpSpPr/>
         <p:nvPr/>
       </p:nvGrpSpPr>
-      <p:grpSpPr>
-        <a:xfrm>
-          <a:off x="0" y="0"/>
-          <a:ext cx="0" cy="0"/>
-          <a:chOff x="0" y="0"/>
-          <a:chExt cx="0" cy="0"/>
-        </a:xfrm>
-      </p:grpSpPr>
+      <p:grpSpPr/>
       <p:sp>
         <p:nvSpPr>
           <p:cNvPr id="2" name="Rectangle 1"/>
@@ -7329,7 +7196,6 @@
           <a:lstStyle/>
           <a:p>
             <a:pPr algn="ctr"/>
-            <a:endParaRPr/>
           </a:p>
         </p:txBody>
       </p:sp>
@@ -7374,7 +7240,6 @@
           <a:lstStyle/>
           <a:p>
             <a:pPr algn="ctr"/>
-            <a:endParaRPr/>
           </a:p>
         </p:txBody>
       </p:sp>
@@ -7816,27 +7681,9 @@
                 <a:tableStyleId>{5C22544A-7EE6-4342-B048-85BDC9FD1C3A}</a:tableStyleId>
               </a:tblPr>
               <a:tblGrid>
-                <a:gridCol w="1645920">
-                  <a:extLst>
-                    <a:ext uri="{9D8B030D-6E8A-4147-A177-3AD203B41FA5}">
-                      <a16:colId xmlns:a16="http://schemas.microsoft.com/office/drawing/2014/main" val="20000"/>
-                    </a:ext>
-                  </a:extLst>
-                </a:gridCol>
-                <a:gridCol w="1645920">
-                  <a:extLst>
-                    <a:ext uri="{9D8B030D-6E8A-4147-A177-3AD203B41FA5}">
-                      <a16:colId xmlns:a16="http://schemas.microsoft.com/office/drawing/2014/main" val="20001"/>
-                    </a:ext>
-                  </a:extLst>
-                </a:gridCol>
-                <a:gridCol w="1645920">
-                  <a:extLst>
-                    <a:ext uri="{9D8B030D-6E8A-4147-A177-3AD203B41FA5}">
-                      <a16:colId xmlns:a16="http://schemas.microsoft.com/office/drawing/2014/main" val="20002"/>
-                    </a:ext>
-                  </a:extLst>
-                </a:gridCol>
+                <a:gridCol w="1645920"/>
+                <a:gridCol w="1645920"/>
+                <a:gridCol w="1645920"/>
               </a:tblGrid>
               <a:tr h="391885">
                 <a:tc>
@@ -7908,11 +7755,6 @@
                     </a:solidFill>
                   </a:tcPr>
                 </a:tc>
-                <a:extLst>
-                  <a:ext uri="{0D108BD9-81ED-4DB2-BD59-A6C34878D82A}">
-                    <a16:rowId xmlns:a16="http://schemas.microsoft.com/office/drawing/2014/main" val="10000"/>
-                  </a:ext>
-                </a:extLst>
               </a:tr>
               <a:tr h="391885">
                 <a:tc>
@@ -7984,11 +7826,6 @@
                     </a:solidFill>
                   </a:tcPr>
                 </a:tc>
-                <a:extLst>
-                  <a:ext uri="{0D108BD9-81ED-4DB2-BD59-A6C34878D82A}">
-                    <a16:rowId xmlns:a16="http://schemas.microsoft.com/office/drawing/2014/main" val="10001"/>
-                  </a:ext>
-                </a:extLst>
               </a:tr>
               <a:tr h="391885">
                 <a:tc>
@@ -8060,11 +7897,6 @@
                     </a:solidFill>
                   </a:tcPr>
                 </a:tc>
-                <a:extLst>
-                  <a:ext uri="{0D108BD9-81ED-4DB2-BD59-A6C34878D82A}">
-                    <a16:rowId xmlns:a16="http://schemas.microsoft.com/office/drawing/2014/main" val="10002"/>
-                  </a:ext>
-                </a:extLst>
               </a:tr>
               <a:tr h="391885">
                 <a:tc>
@@ -8136,11 +7968,6 @@
                     </a:solidFill>
                   </a:tcPr>
                 </a:tc>
-                <a:extLst>
-                  <a:ext uri="{0D108BD9-81ED-4DB2-BD59-A6C34878D82A}">
-                    <a16:rowId xmlns:a16="http://schemas.microsoft.com/office/drawing/2014/main" val="10003"/>
-                  </a:ext>
-                </a:extLst>
               </a:tr>
               <a:tr h="391885">
                 <a:tc>
@@ -8212,11 +8039,6 @@
                     </a:solidFill>
                   </a:tcPr>
                 </a:tc>
-                <a:extLst>
-                  <a:ext uri="{0D108BD9-81ED-4DB2-BD59-A6C34878D82A}">
-                    <a16:rowId xmlns:a16="http://schemas.microsoft.com/office/drawing/2014/main" val="10004"/>
-                  </a:ext>
-                </a:extLst>
               </a:tr>
               <a:tr h="391885">
                 <a:tc>
@@ -8288,11 +8110,6 @@
                     </a:solidFill>
                   </a:tcPr>
                 </a:tc>
-                <a:extLst>
-                  <a:ext uri="{0D108BD9-81ED-4DB2-BD59-A6C34878D82A}">
-                    <a16:rowId xmlns:a16="http://schemas.microsoft.com/office/drawing/2014/main" val="10005"/>
-                  </a:ext>
-                </a:extLst>
               </a:tr>
               <a:tr h="391890">
                 <a:tc>
@@ -8364,11 +8181,6 @@
                     </a:solidFill>
                   </a:tcPr>
                 </a:tc>
-                <a:extLst>
-                  <a:ext uri="{0D108BD9-81ED-4DB2-BD59-A6C34878D82A}">
-                    <a16:rowId xmlns:a16="http://schemas.microsoft.com/office/drawing/2014/main" val="10006"/>
-                  </a:ext>
-                </a:extLst>
               </a:tr>
             </a:tbl>
           </a:graphicData>
@@ -8452,7 +8264,7 @@
 </file>
 
 <file path=ppt/slides/slide7.xml><?xml version="1.0" encoding="utf-8"?>
-<p:sld xmlns:a="http://schemas.openxmlformats.org/drawingml/2006/main" xmlns:r="http://schemas.openxmlformats.org/officeDocument/2006/relationships" xmlns:p="http://schemas.openxmlformats.org/presentationml/2006/main">
+<p:sld xmlns:a="http://schemas.openxmlformats.org/drawingml/2006/main" xmlns:p="http://schemas.openxmlformats.org/presentationml/2006/main" xmlns:r="http://schemas.openxmlformats.org/officeDocument/2006/relationships">
   <p:cSld>
     <p:spTree>
       <p:nvGrpSpPr>
@@ -8460,14 +8272,7 @@
         <p:cNvGrpSpPr/>
         <p:nvPr/>
       </p:nvGrpSpPr>
-      <p:grpSpPr>
-        <a:xfrm>
-          <a:off x="0" y="0"/>
-          <a:ext cx="0" cy="0"/>
-          <a:chOff x="0" y="0"/>
-          <a:chExt cx="0" cy="0"/>
-        </a:xfrm>
-      </p:grpSpPr>
+      <p:grpSpPr/>
       <p:sp>
         <p:nvSpPr>
           <p:cNvPr id="2" name="Rectangle 1"/>
@@ -8509,7 +8314,6 @@
           <a:lstStyle/>
           <a:p>
             <a:pPr algn="ctr"/>
-            <a:endParaRPr/>
           </a:p>
         </p:txBody>
       </p:sp>
@@ -8554,7 +8358,6 @@
           <a:lstStyle/>
           <a:p>
             <a:pPr algn="ctr"/>
-            <a:endParaRPr/>
           </a:p>
         </p:txBody>
       </p:sp>
@@ -8739,34 +8542,10 @@
                 <a:tableStyleId>{5C22544A-7EE6-4342-B048-85BDC9FD1C3A}</a:tableStyleId>
               </a:tblPr>
               <a:tblGrid>
-                <a:gridCol w="1325880">
-                  <a:extLst>
-                    <a:ext uri="{9D8B030D-6E8A-4147-A177-3AD203B41FA5}">
-                      <a16:colId xmlns:a16="http://schemas.microsoft.com/office/drawing/2014/main" val="20000"/>
-                    </a:ext>
-                  </a:extLst>
-                </a:gridCol>
-                <a:gridCol w="1325880">
-                  <a:extLst>
-                    <a:ext uri="{9D8B030D-6E8A-4147-A177-3AD203B41FA5}">
-                      <a16:colId xmlns:a16="http://schemas.microsoft.com/office/drawing/2014/main" val="20001"/>
-                    </a:ext>
-                  </a:extLst>
-                </a:gridCol>
-                <a:gridCol w="1325880">
-                  <a:extLst>
-                    <a:ext uri="{9D8B030D-6E8A-4147-A177-3AD203B41FA5}">
-                      <a16:colId xmlns:a16="http://schemas.microsoft.com/office/drawing/2014/main" val="20002"/>
-                    </a:ext>
-                  </a:extLst>
-                </a:gridCol>
-                <a:gridCol w="1325880">
-                  <a:extLst>
-                    <a:ext uri="{9D8B030D-6E8A-4147-A177-3AD203B41FA5}">
-                      <a16:colId xmlns:a16="http://schemas.microsoft.com/office/drawing/2014/main" val="20003"/>
-                    </a:ext>
-                  </a:extLst>
-                </a:gridCol>
+                <a:gridCol w="1325880"/>
+                <a:gridCol w="1325880"/>
+                <a:gridCol w="1325880"/>
+                <a:gridCol w="1325880"/>
               </a:tblGrid>
               <a:tr h="261257">
                 <a:tc>
@@ -8861,11 +8640,6 @@
                     </a:solidFill>
                   </a:tcPr>
                 </a:tc>
-                <a:extLst>
-                  <a:ext uri="{0D108BD9-81ED-4DB2-BD59-A6C34878D82A}">
-                    <a16:rowId xmlns:a16="http://schemas.microsoft.com/office/drawing/2014/main" val="10000"/>
-                  </a:ext>
-                </a:extLst>
               </a:tr>
               <a:tr h="261257">
                 <a:tc>
@@ -8960,11 +8734,6 @@
                     </a:solidFill>
                   </a:tcPr>
                 </a:tc>
-                <a:extLst>
-                  <a:ext uri="{0D108BD9-81ED-4DB2-BD59-A6C34878D82A}">
-                    <a16:rowId xmlns:a16="http://schemas.microsoft.com/office/drawing/2014/main" val="10001"/>
-                  </a:ext>
-                </a:extLst>
               </a:tr>
               <a:tr h="261257">
                 <a:tc>
@@ -9059,11 +8828,6 @@
                     </a:solidFill>
                   </a:tcPr>
                 </a:tc>
-                <a:extLst>
-                  <a:ext uri="{0D108BD9-81ED-4DB2-BD59-A6C34878D82A}">
-                    <a16:rowId xmlns:a16="http://schemas.microsoft.com/office/drawing/2014/main" val="10002"/>
-                  </a:ext>
-                </a:extLst>
               </a:tr>
               <a:tr h="261257">
                 <a:tc>
@@ -9158,11 +8922,6 @@
                     </a:solidFill>
                   </a:tcPr>
                 </a:tc>
-                <a:extLst>
-                  <a:ext uri="{0D108BD9-81ED-4DB2-BD59-A6C34878D82A}">
-                    <a16:rowId xmlns:a16="http://schemas.microsoft.com/office/drawing/2014/main" val="10003"/>
-                  </a:ext>
-                </a:extLst>
               </a:tr>
               <a:tr h="261257">
                 <a:tc>
@@ -9257,11 +9016,6 @@
                     </a:solidFill>
                   </a:tcPr>
                 </a:tc>
-                <a:extLst>
-                  <a:ext uri="{0D108BD9-81ED-4DB2-BD59-A6C34878D82A}">
-                    <a16:rowId xmlns:a16="http://schemas.microsoft.com/office/drawing/2014/main" val="10004"/>
-                  </a:ext>
-                </a:extLst>
               </a:tr>
               <a:tr h="261257">
                 <a:tc>
@@ -9356,11 +9110,6 @@
                     </a:solidFill>
                   </a:tcPr>
                 </a:tc>
-                <a:extLst>
-                  <a:ext uri="{0D108BD9-81ED-4DB2-BD59-A6C34878D82A}">
-                    <a16:rowId xmlns:a16="http://schemas.microsoft.com/office/drawing/2014/main" val="10005"/>
-                  </a:ext>
-                </a:extLst>
               </a:tr>
               <a:tr h="261258">
                 <a:tc>
@@ -9455,11 +9204,6 @@
                     </a:solidFill>
                   </a:tcPr>
                 </a:tc>
-                <a:extLst>
-                  <a:ext uri="{0D108BD9-81ED-4DB2-BD59-A6C34878D82A}">
-                    <a16:rowId xmlns:a16="http://schemas.microsoft.com/office/drawing/2014/main" val="10006"/>
-                  </a:ext>
-                </a:extLst>
               </a:tr>
             </a:tbl>
           </a:graphicData>
@@ -9519,41 +9263,11 @@
                 <a:tableStyleId>{5C22544A-7EE6-4342-B048-85BDC9FD1C3A}</a:tableStyleId>
               </a:tblPr>
               <a:tblGrid>
-                <a:gridCol w="1828800">
-                  <a:extLst>
-                    <a:ext uri="{9D8B030D-6E8A-4147-A177-3AD203B41FA5}">
-                      <a16:colId xmlns:a16="http://schemas.microsoft.com/office/drawing/2014/main" val="20000"/>
-                    </a:ext>
-                  </a:extLst>
-                </a:gridCol>
-                <a:gridCol w="822960">
-                  <a:extLst>
-                    <a:ext uri="{9D8B030D-6E8A-4147-A177-3AD203B41FA5}">
-                      <a16:colId xmlns:a16="http://schemas.microsoft.com/office/drawing/2014/main" val="20001"/>
-                    </a:ext>
-                  </a:extLst>
-                </a:gridCol>
-                <a:gridCol w="548640">
-                  <a:extLst>
-                    <a:ext uri="{9D8B030D-6E8A-4147-A177-3AD203B41FA5}">
-                      <a16:colId xmlns:a16="http://schemas.microsoft.com/office/drawing/2014/main" val="20002"/>
-                    </a:ext>
-                  </a:extLst>
-                </a:gridCol>
-                <a:gridCol w="1280160">
-                  <a:extLst>
-                    <a:ext uri="{9D8B030D-6E8A-4147-A177-3AD203B41FA5}">
-                      <a16:colId xmlns:a16="http://schemas.microsoft.com/office/drawing/2014/main" val="20003"/>
-                    </a:ext>
-                  </a:extLst>
-                </a:gridCol>
-                <a:gridCol w="914400">
-                  <a:extLst>
-                    <a:ext uri="{9D8B030D-6E8A-4147-A177-3AD203B41FA5}">
-                      <a16:colId xmlns:a16="http://schemas.microsoft.com/office/drawing/2014/main" val="20004"/>
-                    </a:ext>
-                  </a:extLst>
-                </a:gridCol>
+                <a:gridCol w="1828800"/>
+                <a:gridCol w="822960"/>
+                <a:gridCol w="548640"/>
+                <a:gridCol w="1280160"/>
+                <a:gridCol w="914400"/>
               </a:tblGrid>
               <a:tr h="215537">
                 <a:tc>
@@ -9671,11 +9385,6 @@
                     </a:solidFill>
                   </a:tcPr>
                 </a:tc>
-                <a:extLst>
-                  <a:ext uri="{0D108BD9-81ED-4DB2-BD59-A6C34878D82A}">
-                    <a16:rowId xmlns:a16="http://schemas.microsoft.com/office/drawing/2014/main" val="10000"/>
-                  </a:ext>
-                </a:extLst>
               </a:tr>
               <a:tr h="215537">
                 <a:tc>
@@ -9793,11 +9502,6 @@
                     </a:solidFill>
                   </a:tcPr>
                 </a:tc>
-                <a:extLst>
-                  <a:ext uri="{0D108BD9-81ED-4DB2-BD59-A6C34878D82A}">
-                    <a16:rowId xmlns:a16="http://schemas.microsoft.com/office/drawing/2014/main" val="10001"/>
-                  </a:ext>
-                </a:extLst>
               </a:tr>
               <a:tr h="215537">
                 <a:tc>
@@ -9915,11 +9619,6 @@
                     </a:solidFill>
                   </a:tcPr>
                 </a:tc>
-                <a:extLst>
-                  <a:ext uri="{0D108BD9-81ED-4DB2-BD59-A6C34878D82A}">
-                    <a16:rowId xmlns:a16="http://schemas.microsoft.com/office/drawing/2014/main" val="10002"/>
-                  </a:ext>
-                </a:extLst>
               </a:tr>
               <a:tr h="215537">
                 <a:tc>
@@ -10037,11 +9736,6 @@
                     </a:solidFill>
                   </a:tcPr>
                 </a:tc>
-                <a:extLst>
-                  <a:ext uri="{0D108BD9-81ED-4DB2-BD59-A6C34878D82A}">
-                    <a16:rowId xmlns:a16="http://schemas.microsoft.com/office/drawing/2014/main" val="10003"/>
-                  </a:ext>
-                </a:extLst>
               </a:tr>
               <a:tr h="215537">
                 <a:tc>
@@ -10159,11 +9853,6 @@
                     </a:solidFill>
                   </a:tcPr>
                 </a:tc>
-                <a:extLst>
-                  <a:ext uri="{0D108BD9-81ED-4DB2-BD59-A6C34878D82A}">
-                    <a16:rowId xmlns:a16="http://schemas.microsoft.com/office/drawing/2014/main" val="10004"/>
-                  </a:ext>
-                </a:extLst>
               </a:tr>
               <a:tr h="215537">
                 <a:tc>
@@ -10281,11 +9970,6 @@
                     </a:solidFill>
                   </a:tcPr>
                 </a:tc>
-                <a:extLst>
-                  <a:ext uri="{0D108BD9-81ED-4DB2-BD59-A6C34878D82A}">
-                    <a16:rowId xmlns:a16="http://schemas.microsoft.com/office/drawing/2014/main" val="10005"/>
-                  </a:ext>
-                </a:extLst>
               </a:tr>
               <a:tr h="215538">
                 <a:tc>
@@ -10403,11 +10087,6 @@
                     </a:solidFill>
                   </a:tcPr>
                 </a:tc>
-                <a:extLst>
-                  <a:ext uri="{0D108BD9-81ED-4DB2-BD59-A6C34878D82A}">
-                    <a16:rowId xmlns:a16="http://schemas.microsoft.com/office/drawing/2014/main" val="10006"/>
-                  </a:ext>
-                </a:extLst>
               </a:tr>
             </a:tbl>
           </a:graphicData>
@@ -10467,41 +10146,11 @@
                 <a:tableStyleId>{5C22544A-7EE6-4342-B048-85BDC9FD1C3A}</a:tableStyleId>
               </a:tblPr>
               <a:tblGrid>
-                <a:gridCol w="1920240">
-                  <a:extLst>
-                    <a:ext uri="{9D8B030D-6E8A-4147-A177-3AD203B41FA5}">
-                      <a16:colId xmlns:a16="http://schemas.microsoft.com/office/drawing/2014/main" val="20000"/>
-                    </a:ext>
-                  </a:extLst>
-                </a:gridCol>
-                <a:gridCol w="822960">
-                  <a:extLst>
-                    <a:ext uri="{9D8B030D-6E8A-4147-A177-3AD203B41FA5}">
-                      <a16:colId xmlns:a16="http://schemas.microsoft.com/office/drawing/2014/main" val="20001"/>
-                    </a:ext>
-                  </a:extLst>
-                </a:gridCol>
-                <a:gridCol w="731520">
-                  <a:extLst>
-                    <a:ext uri="{9D8B030D-6E8A-4147-A177-3AD203B41FA5}">
-                      <a16:colId xmlns:a16="http://schemas.microsoft.com/office/drawing/2014/main" val="20002"/>
-                    </a:ext>
-                  </a:extLst>
-                </a:gridCol>
-                <a:gridCol w="914400">
-                  <a:extLst>
-                    <a:ext uri="{9D8B030D-6E8A-4147-A177-3AD203B41FA5}">
-                      <a16:colId xmlns:a16="http://schemas.microsoft.com/office/drawing/2014/main" val="20003"/>
-                    </a:ext>
-                  </a:extLst>
-                </a:gridCol>
-                <a:gridCol w="914400">
-                  <a:extLst>
-                    <a:ext uri="{9D8B030D-6E8A-4147-A177-3AD203B41FA5}">
-                      <a16:colId xmlns:a16="http://schemas.microsoft.com/office/drawing/2014/main" val="20004"/>
-                    </a:ext>
-                  </a:extLst>
-                </a:gridCol>
+                <a:gridCol w="1920240"/>
+                <a:gridCol w="822960"/>
+                <a:gridCol w="731520"/>
+                <a:gridCol w="914400"/>
+                <a:gridCol w="914400"/>
               </a:tblGrid>
               <a:tr h="215537">
                 <a:tc>
@@ -10619,11 +10268,6 @@
                     </a:solidFill>
                   </a:tcPr>
                 </a:tc>
-                <a:extLst>
-                  <a:ext uri="{0D108BD9-81ED-4DB2-BD59-A6C34878D82A}">
-                    <a16:rowId xmlns:a16="http://schemas.microsoft.com/office/drawing/2014/main" val="10000"/>
-                  </a:ext>
-                </a:extLst>
               </a:tr>
               <a:tr h="215537">
                 <a:tc>
@@ -10741,11 +10385,6 @@
                     </a:solidFill>
                   </a:tcPr>
                 </a:tc>
-                <a:extLst>
-                  <a:ext uri="{0D108BD9-81ED-4DB2-BD59-A6C34878D82A}">
-                    <a16:rowId xmlns:a16="http://schemas.microsoft.com/office/drawing/2014/main" val="10001"/>
-                  </a:ext>
-                </a:extLst>
               </a:tr>
               <a:tr h="215537">
                 <a:tc>
@@ -10863,11 +10502,6 @@
                     </a:solidFill>
                   </a:tcPr>
                 </a:tc>
-                <a:extLst>
-                  <a:ext uri="{0D108BD9-81ED-4DB2-BD59-A6C34878D82A}">
-                    <a16:rowId xmlns:a16="http://schemas.microsoft.com/office/drawing/2014/main" val="10002"/>
-                  </a:ext>
-                </a:extLst>
               </a:tr>
               <a:tr h="215537">
                 <a:tc>
@@ -10985,11 +10619,6 @@
                     </a:solidFill>
                   </a:tcPr>
                 </a:tc>
-                <a:extLst>
-                  <a:ext uri="{0D108BD9-81ED-4DB2-BD59-A6C34878D82A}">
-                    <a16:rowId xmlns:a16="http://schemas.microsoft.com/office/drawing/2014/main" val="10003"/>
-                  </a:ext>
-                </a:extLst>
               </a:tr>
               <a:tr h="215537">
                 <a:tc>
@@ -11107,11 +10736,6 @@
                     </a:solidFill>
                   </a:tcPr>
                 </a:tc>
-                <a:extLst>
-                  <a:ext uri="{0D108BD9-81ED-4DB2-BD59-A6C34878D82A}">
-                    <a16:rowId xmlns:a16="http://schemas.microsoft.com/office/drawing/2014/main" val="10004"/>
-                  </a:ext>
-                </a:extLst>
               </a:tr>
               <a:tr h="215537">
                 <a:tc>
@@ -11229,11 +10853,6 @@
                     </a:solidFill>
                   </a:tcPr>
                 </a:tc>
-                <a:extLst>
-                  <a:ext uri="{0D108BD9-81ED-4DB2-BD59-A6C34878D82A}">
-                    <a16:rowId xmlns:a16="http://schemas.microsoft.com/office/drawing/2014/main" val="10005"/>
-                  </a:ext>
-                </a:extLst>
               </a:tr>
               <a:tr h="215538">
                 <a:tc>
@@ -11351,11 +10970,6 @@
                     </a:solidFill>
                   </a:tcPr>
                 </a:tc>
-                <a:extLst>
-                  <a:ext uri="{0D108BD9-81ED-4DB2-BD59-A6C34878D82A}">
-                    <a16:rowId xmlns:a16="http://schemas.microsoft.com/office/drawing/2014/main" val="10006"/>
-                  </a:ext>
-                </a:extLst>
               </a:tr>
             </a:tbl>
           </a:graphicData>
@@ -11439,7 +11053,7 @@
 </file>
 
 <file path=ppt/slides/slide8.xml><?xml version="1.0" encoding="utf-8"?>
-<p:sld xmlns:a="http://schemas.openxmlformats.org/drawingml/2006/main" xmlns:r="http://schemas.openxmlformats.org/officeDocument/2006/relationships" xmlns:p="http://schemas.openxmlformats.org/presentationml/2006/main">
+<p:sld xmlns:a="http://schemas.openxmlformats.org/drawingml/2006/main" xmlns:p="http://schemas.openxmlformats.org/presentationml/2006/main" xmlns:r="http://schemas.openxmlformats.org/officeDocument/2006/relationships">
   <p:cSld>
     <p:spTree>
       <p:nvGrpSpPr>
@@ -11447,14 +11061,7 @@
         <p:cNvGrpSpPr/>
         <p:nvPr/>
       </p:nvGrpSpPr>
-      <p:grpSpPr>
-        <a:xfrm>
-          <a:off x="0" y="0"/>
-          <a:ext cx="0" cy="0"/>
-          <a:chOff x="0" y="0"/>
-          <a:chExt cx="0" cy="0"/>
-        </a:xfrm>
-      </p:grpSpPr>
+      <p:grpSpPr/>
       <p:sp>
         <p:nvSpPr>
           <p:cNvPr id="2" name="Rectangle 1"/>
@@ -11496,7 +11103,6 @@
           <a:lstStyle/>
           <a:p>
             <a:pPr algn="ctr"/>
-            <a:endParaRPr/>
           </a:p>
         </p:txBody>
       </p:sp>
@@ -11541,7 +11147,6 @@
           <a:lstStyle/>
           <a:p>
             <a:pPr algn="ctr"/>
-            <a:endParaRPr/>
           </a:p>
         </p:txBody>
       </p:sp>
@@ -11632,48 +11237,12 @@
                 <a:tableStyleId>{5C22544A-7EE6-4342-B048-85BDC9FD1C3A}</a:tableStyleId>
               </a:tblPr>
               <a:tblGrid>
-                <a:gridCol w="1798320">
-                  <a:extLst>
-                    <a:ext uri="{9D8B030D-6E8A-4147-A177-3AD203B41FA5}">
-                      <a16:colId xmlns:a16="http://schemas.microsoft.com/office/drawing/2014/main" val="20000"/>
-                    </a:ext>
-                  </a:extLst>
-                </a:gridCol>
-                <a:gridCol w="1798320">
-                  <a:extLst>
-                    <a:ext uri="{9D8B030D-6E8A-4147-A177-3AD203B41FA5}">
-                      <a16:colId xmlns:a16="http://schemas.microsoft.com/office/drawing/2014/main" val="20001"/>
-                    </a:ext>
-                  </a:extLst>
-                </a:gridCol>
-                <a:gridCol w="1798320">
-                  <a:extLst>
-                    <a:ext uri="{9D8B030D-6E8A-4147-A177-3AD203B41FA5}">
-                      <a16:colId xmlns:a16="http://schemas.microsoft.com/office/drawing/2014/main" val="20002"/>
-                    </a:ext>
-                  </a:extLst>
-                </a:gridCol>
-                <a:gridCol w="1798320">
-                  <a:extLst>
-                    <a:ext uri="{9D8B030D-6E8A-4147-A177-3AD203B41FA5}">
-                      <a16:colId xmlns:a16="http://schemas.microsoft.com/office/drawing/2014/main" val="20003"/>
-                    </a:ext>
-                  </a:extLst>
-                </a:gridCol>
-                <a:gridCol w="1798320">
-                  <a:extLst>
-                    <a:ext uri="{9D8B030D-6E8A-4147-A177-3AD203B41FA5}">
-                      <a16:colId xmlns:a16="http://schemas.microsoft.com/office/drawing/2014/main" val="20004"/>
-                    </a:ext>
-                  </a:extLst>
-                </a:gridCol>
-                <a:gridCol w="1798320">
-                  <a:extLst>
-                    <a:ext uri="{9D8B030D-6E8A-4147-A177-3AD203B41FA5}">
-                      <a16:colId xmlns:a16="http://schemas.microsoft.com/office/drawing/2014/main" val="20005"/>
-                    </a:ext>
-                  </a:extLst>
-                </a:gridCol>
+                <a:gridCol w="1798320"/>
+                <a:gridCol w="1798320"/>
+                <a:gridCol w="1798320"/>
+                <a:gridCol w="1798320"/>
+                <a:gridCol w="1798320"/>
+                <a:gridCol w="1798320"/>
               </a:tblGrid>
               <a:tr h="444137">
                 <a:tc>
@@ -11814,11 +11383,6 @@
                     </a:solidFill>
                   </a:tcPr>
                 </a:tc>
-                <a:extLst>
-                  <a:ext uri="{0D108BD9-81ED-4DB2-BD59-A6C34878D82A}">
-                    <a16:rowId xmlns:a16="http://schemas.microsoft.com/office/drawing/2014/main" val="10000"/>
-                  </a:ext>
-                </a:extLst>
               </a:tr>
               <a:tr h="444137">
                 <a:tc>
@@ -11959,11 +11523,6 @@
                     </a:solidFill>
                   </a:tcPr>
                 </a:tc>
-                <a:extLst>
-                  <a:ext uri="{0D108BD9-81ED-4DB2-BD59-A6C34878D82A}">
-                    <a16:rowId xmlns:a16="http://schemas.microsoft.com/office/drawing/2014/main" val="10001"/>
-                  </a:ext>
-                </a:extLst>
               </a:tr>
               <a:tr h="444137">
                 <a:tc>
@@ -12104,11 +11663,6 @@
                     </a:solidFill>
                   </a:tcPr>
                 </a:tc>
-                <a:extLst>
-                  <a:ext uri="{0D108BD9-81ED-4DB2-BD59-A6C34878D82A}">
-                    <a16:rowId xmlns:a16="http://schemas.microsoft.com/office/drawing/2014/main" val="10002"/>
-                  </a:ext>
-                </a:extLst>
               </a:tr>
               <a:tr h="444137">
                 <a:tc>
@@ -12249,11 +11803,6 @@
                     </a:solidFill>
                   </a:tcPr>
                 </a:tc>
-                <a:extLst>
-                  <a:ext uri="{0D108BD9-81ED-4DB2-BD59-A6C34878D82A}">
-                    <a16:rowId xmlns:a16="http://schemas.microsoft.com/office/drawing/2014/main" val="10003"/>
-                  </a:ext>
-                </a:extLst>
               </a:tr>
               <a:tr h="444137">
                 <a:tc>
@@ -12394,11 +11943,6 @@
                     </a:solidFill>
                   </a:tcPr>
                 </a:tc>
-                <a:extLst>
-                  <a:ext uri="{0D108BD9-81ED-4DB2-BD59-A6C34878D82A}">
-                    <a16:rowId xmlns:a16="http://schemas.microsoft.com/office/drawing/2014/main" val="10004"/>
-                  </a:ext>
-                </a:extLst>
               </a:tr>
               <a:tr h="444137">
                 <a:tc>
@@ -12539,11 +12083,6 @@
                     </a:solidFill>
                   </a:tcPr>
                 </a:tc>
-                <a:extLst>
-                  <a:ext uri="{0D108BD9-81ED-4DB2-BD59-A6C34878D82A}">
-                    <a16:rowId xmlns:a16="http://schemas.microsoft.com/office/drawing/2014/main" val="10005"/>
-                  </a:ext>
-                </a:extLst>
               </a:tr>
               <a:tr h="444138">
                 <a:tc>
@@ -12684,11 +12223,6 @@
                     </a:solidFill>
                   </a:tcPr>
                 </a:tc>
-                <a:extLst>
-                  <a:ext uri="{0D108BD9-81ED-4DB2-BD59-A6C34878D82A}">
-                    <a16:rowId xmlns:a16="http://schemas.microsoft.com/office/drawing/2014/main" val="10006"/>
-                  </a:ext>
-                </a:extLst>
               </a:tr>
             </a:tbl>
           </a:graphicData>
@@ -12772,7 +12306,7 @@
 </file>
 
 <file path=ppt/slides/slide9.xml><?xml version="1.0" encoding="utf-8"?>
-<p:sld xmlns:a="http://schemas.openxmlformats.org/drawingml/2006/main" xmlns:r="http://schemas.openxmlformats.org/officeDocument/2006/relationships" xmlns:p="http://schemas.openxmlformats.org/presentationml/2006/main">
+<p:sld xmlns:a="http://schemas.openxmlformats.org/drawingml/2006/main" xmlns:p="http://schemas.openxmlformats.org/presentationml/2006/main" xmlns:r="http://schemas.openxmlformats.org/officeDocument/2006/relationships">
   <p:cSld>
     <p:spTree>
       <p:nvGrpSpPr>
@@ -12780,14 +12314,7 @@
         <p:cNvGrpSpPr/>
         <p:nvPr/>
       </p:nvGrpSpPr>
-      <p:grpSpPr>
-        <a:xfrm>
-          <a:off x="0" y="0"/>
-          <a:ext cx="0" cy="0"/>
-          <a:chOff x="0" y="0"/>
-          <a:chExt cx="0" cy="0"/>
-        </a:xfrm>
-      </p:grpSpPr>
+      <p:grpSpPr/>
       <p:sp>
         <p:nvSpPr>
           <p:cNvPr id="2" name="Rectangle 1"/>
@@ -12829,7 +12356,6 @@
           <a:lstStyle/>
           <a:p>
             <a:pPr algn="ctr"/>
-            <a:endParaRPr/>
           </a:p>
         </p:txBody>
       </p:sp>
@@ -12874,7 +12400,6 @@
           <a:lstStyle/>
           <a:p>
             <a:pPr algn="ctr"/>
-            <a:endParaRPr/>
           </a:p>
         </p:txBody>
       </p:sp>

--- a/deck/Review_Presentation.pptx
+++ b/deck/Review_Presentation.pptx
@@ -5,18 +5,18 @@
     <p:sldMasterId id="2147483648" r:id="rId1"/>
   </p:sldMasterIdLst>
   <p:sldIdLst>
-    <p:sldId id="256" r:id="rId7"/>
-    <p:sldId id="257" r:id="rId8"/>
-    <p:sldId id="258" r:id="rId9"/>
-    <p:sldId id="259" r:id="rId10"/>
-    <p:sldId id="260" r:id="rId11"/>
-    <p:sldId id="261" r:id="rId12"/>
-    <p:sldId id="262" r:id="rId13"/>
-    <p:sldId id="263" r:id="rId14"/>
-    <p:sldId id="264" r:id="rId15"/>
-    <p:sldId id="265" r:id="rId16"/>
+    <p:sldId id="256" r:id="rId2"/>
+    <p:sldId id="257" r:id="rId3"/>
+    <p:sldId id="258" r:id="rId4"/>
+    <p:sldId id="259" r:id="rId5"/>
+    <p:sldId id="260" r:id="rId6"/>
+    <p:sldId id="261" r:id="rId7"/>
+    <p:sldId id="262" r:id="rId8"/>
+    <p:sldId id="263" r:id="rId9"/>
+    <p:sldId id="264" r:id="rId10"/>
+    <p:sldId id="265" r:id="rId11"/>
   </p:sldIdLst>
-  <p:sldSz cx="12191695" cy="6858000" type="screen4x3"/>
+  <p:sldSz cx="12192000" cy="6858000"/>
   <p:notesSz cx="6858000" cy="9144000"/>
   <p:defaultTextStyle>
     <a:defPPr>
@@ -113,6 +113,22 @@
       </a:defRPr>
     </a:lvl9pPr>
   </p:defaultTextStyle>
+  <p:extLst>
+    <p:ext uri="{EFAFB233-063F-42B5-8137-9DF3F51BA10A}">
+      <p15:sldGuideLst xmlns:p15="http://schemas.microsoft.com/office/powerpoint/2012/main">
+        <p15:guide id="1" orient="horz" pos="2160">
+          <p15:clr>
+            <a:srgbClr val="A4A3A4"/>
+          </p15:clr>
+        </p15:guide>
+        <p15:guide id="2" pos="2880">
+          <p15:clr>
+            <a:srgbClr val="A4A3A4"/>
+          </p15:clr>
+        </p15:guide>
+      </p15:sldGuideLst>
+    </p:ext>
+  </p:extLst>
 </p:presentation>
 </file>
 
@@ -154,10 +170,9 @@
           <a:lstStyle/>
           <a:p>
             <a:r>
-              <a:rPr lang="en-US" smtClean="0"/>
+              <a:rPr lang="en-US"/>
               <a:t>Click to edit Master title style</a:t>
             </a:r>
-            <a:endParaRPr lang="en-US"/>
           </a:p>
         </p:txBody>
       </p:sp>
@@ -273,10 +288,9 @@
           </a:lstStyle>
           <a:p>
             <a:r>
-              <a:rPr lang="en-US" smtClean="0"/>
+              <a:rPr lang="en-US"/>
               <a:t>Click to edit Master subtitle style</a:t>
             </a:r>
-            <a:endParaRPr lang="en-US"/>
           </a:p>
         </p:txBody>
       </p:sp>
@@ -297,7 +311,7 @@
           <a:p>
             <a:fld id="{5BCAD085-E8A6-8845-BD4E-CB4CCA059FC4}" type="datetimeFigureOut">
               <a:rPr lang="en-US" smtClean="0"/>
-              <a:t>1/27/13</a:t>
+              <a:t>08-Jul-26</a:t>
             </a:fld>
             <a:endParaRPr lang="en-US"/>
           </a:p>
@@ -391,10 +405,9 @@
           <a:lstStyle/>
           <a:p>
             <a:r>
-              <a:rPr lang="en-US" smtClean="0"/>
+              <a:rPr lang="en-US"/>
               <a:t>Click to edit Master title style</a:t>
             </a:r>
-            <a:endParaRPr lang="en-US"/>
           </a:p>
         </p:txBody>
       </p:sp>
@@ -415,38 +428,37 @@
           <a:p>
             <a:pPr lvl="0"/>
             <a:r>
-              <a:rPr lang="en-US" smtClean="0"/>
+              <a:rPr lang="en-US"/>
               <a:t>Click to edit Master text styles</a:t>
             </a:r>
           </a:p>
           <a:p>
             <a:pPr lvl="1"/>
             <a:r>
-              <a:rPr lang="en-US" smtClean="0"/>
+              <a:rPr lang="en-US"/>
               <a:t>Second level</a:t>
             </a:r>
           </a:p>
           <a:p>
             <a:pPr lvl="2"/>
             <a:r>
-              <a:rPr lang="en-US" smtClean="0"/>
+              <a:rPr lang="en-US"/>
               <a:t>Third level</a:t>
             </a:r>
           </a:p>
           <a:p>
             <a:pPr lvl="3"/>
             <a:r>
-              <a:rPr lang="en-US" smtClean="0"/>
+              <a:rPr lang="en-US"/>
               <a:t>Fourth level</a:t>
             </a:r>
           </a:p>
           <a:p>
             <a:pPr lvl="4"/>
             <a:r>
-              <a:rPr lang="en-US" smtClean="0"/>
+              <a:rPr lang="en-US"/>
               <a:t>Fifth level</a:t>
             </a:r>
-            <a:endParaRPr lang="en-US"/>
           </a:p>
         </p:txBody>
       </p:sp>
@@ -467,7 +479,7 @@
           <a:p>
             <a:fld id="{5BCAD085-E8A6-8845-BD4E-CB4CCA059FC4}" type="datetimeFigureOut">
               <a:rPr lang="en-US" smtClean="0"/>
-              <a:t>1/27/13</a:t>
+              <a:t>08-Jul-26</a:t>
             </a:fld>
             <a:endParaRPr lang="en-US"/>
           </a:p>
@@ -566,10 +578,9 @@
           <a:lstStyle/>
           <a:p>
             <a:r>
-              <a:rPr lang="en-US" smtClean="0"/>
+              <a:rPr lang="en-US"/>
               <a:t>Click to edit Master title style</a:t>
             </a:r>
-            <a:endParaRPr lang="en-US"/>
           </a:p>
         </p:txBody>
       </p:sp>
@@ -595,38 +606,37 @@
           <a:p>
             <a:pPr lvl="0"/>
             <a:r>
-              <a:rPr lang="en-US" smtClean="0"/>
+              <a:rPr lang="en-US"/>
               <a:t>Click to edit Master text styles</a:t>
             </a:r>
           </a:p>
           <a:p>
             <a:pPr lvl="1"/>
             <a:r>
-              <a:rPr lang="en-US" smtClean="0"/>
+              <a:rPr lang="en-US"/>
               <a:t>Second level</a:t>
             </a:r>
           </a:p>
           <a:p>
             <a:pPr lvl="2"/>
             <a:r>
-              <a:rPr lang="en-US" smtClean="0"/>
+              <a:rPr lang="en-US"/>
               <a:t>Third level</a:t>
             </a:r>
           </a:p>
           <a:p>
             <a:pPr lvl="3"/>
             <a:r>
-              <a:rPr lang="en-US" smtClean="0"/>
+              <a:rPr lang="en-US"/>
               <a:t>Fourth level</a:t>
             </a:r>
           </a:p>
           <a:p>
             <a:pPr lvl="4"/>
             <a:r>
-              <a:rPr lang="en-US" smtClean="0"/>
+              <a:rPr lang="en-US"/>
               <a:t>Fifth level</a:t>
             </a:r>
-            <a:endParaRPr lang="en-US"/>
           </a:p>
         </p:txBody>
       </p:sp>
@@ -647,7 +657,7 @@
           <a:p>
             <a:fld id="{5BCAD085-E8A6-8845-BD4E-CB4CCA059FC4}" type="datetimeFigureOut">
               <a:rPr lang="en-US" smtClean="0"/>
-              <a:t>1/27/13</a:t>
+              <a:t>08-Jul-26</a:t>
             </a:fld>
             <a:endParaRPr lang="en-US"/>
           </a:p>
@@ -741,10 +751,9 @@
           <a:lstStyle/>
           <a:p>
             <a:r>
-              <a:rPr lang="en-US" smtClean="0"/>
+              <a:rPr lang="en-US"/>
               <a:t>Click to edit Master title style</a:t>
             </a:r>
-            <a:endParaRPr lang="en-US"/>
           </a:p>
         </p:txBody>
       </p:sp>
@@ -765,38 +774,37 @@
           <a:p>
             <a:pPr lvl="0"/>
             <a:r>
-              <a:rPr lang="en-US" smtClean="0"/>
+              <a:rPr lang="en-US"/>
               <a:t>Click to edit Master text styles</a:t>
             </a:r>
           </a:p>
           <a:p>
             <a:pPr lvl="1"/>
             <a:r>
-              <a:rPr lang="en-US" smtClean="0"/>
+              <a:rPr lang="en-US"/>
               <a:t>Second level</a:t>
             </a:r>
           </a:p>
           <a:p>
             <a:pPr lvl="2"/>
             <a:r>
-              <a:rPr lang="en-US" smtClean="0"/>
+              <a:rPr lang="en-US"/>
               <a:t>Third level</a:t>
             </a:r>
           </a:p>
           <a:p>
             <a:pPr lvl="3"/>
             <a:r>
-              <a:rPr lang="en-US" smtClean="0"/>
+              <a:rPr lang="en-US"/>
               <a:t>Fourth level</a:t>
             </a:r>
           </a:p>
           <a:p>
             <a:pPr lvl="4"/>
             <a:r>
-              <a:rPr lang="en-US" smtClean="0"/>
+              <a:rPr lang="en-US"/>
               <a:t>Fifth level</a:t>
             </a:r>
-            <a:endParaRPr lang="en-US"/>
           </a:p>
         </p:txBody>
       </p:sp>
@@ -817,7 +825,7 @@
           <a:p>
             <a:fld id="{5BCAD085-E8A6-8845-BD4E-CB4CCA059FC4}" type="datetimeFigureOut">
               <a:rPr lang="en-US" smtClean="0"/>
-              <a:t>1/27/13</a:t>
+              <a:t>08-Jul-26</a:t>
             </a:fld>
             <a:endParaRPr lang="en-US"/>
           </a:p>
@@ -920,10 +928,9 @@
           </a:lstStyle>
           <a:p>
             <a:r>
-              <a:rPr lang="en-US" smtClean="0"/>
+              <a:rPr lang="en-US"/>
               <a:t>Click to edit Master title style</a:t>
             </a:r>
-            <a:endParaRPr lang="en-US"/>
           </a:p>
         </p:txBody>
       </p:sp>
@@ -1040,7 +1047,7 @@
           <a:p>
             <a:pPr lvl="0"/>
             <a:r>
-              <a:rPr lang="en-US" smtClean="0"/>
+              <a:rPr lang="en-US"/>
               <a:t>Click to edit Master text styles</a:t>
             </a:r>
           </a:p>
@@ -1063,7 +1070,7 @@
           <a:p>
             <a:fld id="{5BCAD085-E8A6-8845-BD4E-CB4CCA059FC4}" type="datetimeFigureOut">
               <a:rPr lang="en-US" smtClean="0"/>
-              <a:t>1/27/13</a:t>
+              <a:t>08-Jul-26</a:t>
             </a:fld>
             <a:endParaRPr lang="en-US"/>
           </a:p>
@@ -1157,10 +1164,9 @@
           <a:lstStyle/>
           <a:p>
             <a:r>
-              <a:rPr lang="en-US" smtClean="0"/>
+              <a:rPr lang="en-US"/>
               <a:t>Click to edit Master title style</a:t>
             </a:r>
-            <a:endParaRPr lang="en-US"/>
           </a:p>
         </p:txBody>
       </p:sp>
@@ -1214,38 +1220,37 @@
           <a:p>
             <a:pPr lvl="0"/>
             <a:r>
-              <a:rPr lang="en-US" smtClean="0"/>
+              <a:rPr lang="en-US"/>
               <a:t>Click to edit Master text styles</a:t>
             </a:r>
           </a:p>
           <a:p>
             <a:pPr lvl="1"/>
             <a:r>
-              <a:rPr lang="en-US" smtClean="0"/>
+              <a:rPr lang="en-US"/>
               <a:t>Second level</a:t>
             </a:r>
           </a:p>
           <a:p>
             <a:pPr lvl="2"/>
             <a:r>
-              <a:rPr lang="en-US" smtClean="0"/>
+              <a:rPr lang="en-US"/>
               <a:t>Third level</a:t>
             </a:r>
           </a:p>
           <a:p>
             <a:pPr lvl="3"/>
             <a:r>
-              <a:rPr lang="en-US" smtClean="0"/>
+              <a:rPr lang="en-US"/>
               <a:t>Fourth level</a:t>
             </a:r>
           </a:p>
           <a:p>
             <a:pPr lvl="4"/>
             <a:r>
-              <a:rPr lang="en-US" smtClean="0"/>
+              <a:rPr lang="en-US"/>
               <a:t>Fifth level</a:t>
             </a:r>
-            <a:endParaRPr lang="en-US"/>
           </a:p>
         </p:txBody>
       </p:sp>
@@ -1299,38 +1304,37 @@
           <a:p>
             <a:pPr lvl="0"/>
             <a:r>
-              <a:rPr lang="en-US" smtClean="0"/>
+              <a:rPr lang="en-US"/>
               <a:t>Click to edit Master text styles</a:t>
             </a:r>
           </a:p>
           <a:p>
             <a:pPr lvl="1"/>
             <a:r>
-              <a:rPr lang="en-US" smtClean="0"/>
+              <a:rPr lang="en-US"/>
               <a:t>Second level</a:t>
             </a:r>
           </a:p>
           <a:p>
             <a:pPr lvl="2"/>
             <a:r>
-              <a:rPr lang="en-US" smtClean="0"/>
+              <a:rPr lang="en-US"/>
               <a:t>Third level</a:t>
             </a:r>
           </a:p>
           <a:p>
             <a:pPr lvl="3"/>
             <a:r>
-              <a:rPr lang="en-US" smtClean="0"/>
+              <a:rPr lang="en-US"/>
               <a:t>Fourth level</a:t>
             </a:r>
           </a:p>
           <a:p>
             <a:pPr lvl="4"/>
             <a:r>
-              <a:rPr lang="en-US" smtClean="0"/>
+              <a:rPr lang="en-US"/>
               <a:t>Fifth level</a:t>
             </a:r>
-            <a:endParaRPr lang="en-US"/>
           </a:p>
         </p:txBody>
       </p:sp>
@@ -1351,7 +1355,7 @@
           <a:p>
             <a:fld id="{5BCAD085-E8A6-8845-BD4E-CB4CCA059FC4}" type="datetimeFigureOut">
               <a:rPr lang="en-US" smtClean="0"/>
-              <a:t>1/27/13</a:t>
+              <a:t>08-Jul-26</a:t>
             </a:fld>
             <a:endParaRPr lang="en-US"/>
           </a:p>
@@ -1449,10 +1453,9 @@
           </a:lstStyle>
           <a:p>
             <a:r>
-              <a:rPr lang="en-US" smtClean="0"/>
+              <a:rPr lang="en-US"/>
               <a:t>Click to edit Master title style</a:t>
             </a:r>
-            <a:endParaRPr lang="en-US"/>
           </a:p>
         </p:txBody>
       </p:sp>
@@ -1515,7 +1518,7 @@
           <a:p>
             <a:pPr lvl="0"/>
             <a:r>
-              <a:rPr lang="en-US" smtClean="0"/>
+              <a:rPr lang="en-US"/>
               <a:t>Click to edit Master text styles</a:t>
             </a:r>
           </a:p>
@@ -1571,38 +1574,37 @@
           <a:p>
             <a:pPr lvl="0"/>
             <a:r>
-              <a:rPr lang="en-US" smtClean="0"/>
+              <a:rPr lang="en-US"/>
               <a:t>Click to edit Master text styles</a:t>
             </a:r>
           </a:p>
           <a:p>
             <a:pPr lvl="1"/>
             <a:r>
-              <a:rPr lang="en-US" smtClean="0"/>
+              <a:rPr lang="en-US"/>
               <a:t>Second level</a:t>
             </a:r>
           </a:p>
           <a:p>
             <a:pPr lvl="2"/>
             <a:r>
-              <a:rPr lang="en-US" smtClean="0"/>
+              <a:rPr lang="en-US"/>
               <a:t>Third level</a:t>
             </a:r>
           </a:p>
           <a:p>
             <a:pPr lvl="3"/>
             <a:r>
-              <a:rPr lang="en-US" smtClean="0"/>
+              <a:rPr lang="en-US"/>
               <a:t>Fourth level</a:t>
             </a:r>
           </a:p>
           <a:p>
             <a:pPr lvl="4"/>
             <a:r>
-              <a:rPr lang="en-US" smtClean="0"/>
+              <a:rPr lang="en-US"/>
               <a:t>Fifth level</a:t>
             </a:r>
-            <a:endParaRPr lang="en-US"/>
           </a:p>
         </p:txBody>
       </p:sp>
@@ -1665,7 +1667,7 @@
           <a:p>
             <a:pPr lvl="0"/>
             <a:r>
-              <a:rPr lang="en-US" smtClean="0"/>
+              <a:rPr lang="en-US"/>
               <a:t>Click to edit Master text styles</a:t>
             </a:r>
           </a:p>
@@ -1721,38 +1723,37 @@
           <a:p>
             <a:pPr lvl="0"/>
             <a:r>
-              <a:rPr lang="en-US" smtClean="0"/>
+              <a:rPr lang="en-US"/>
               <a:t>Click to edit Master text styles</a:t>
             </a:r>
           </a:p>
           <a:p>
             <a:pPr lvl="1"/>
             <a:r>
-              <a:rPr lang="en-US" smtClean="0"/>
+              <a:rPr lang="en-US"/>
               <a:t>Second level</a:t>
             </a:r>
           </a:p>
           <a:p>
             <a:pPr lvl="2"/>
             <a:r>
-              <a:rPr lang="en-US" smtClean="0"/>
+              <a:rPr lang="en-US"/>
               <a:t>Third level</a:t>
             </a:r>
           </a:p>
           <a:p>
             <a:pPr lvl="3"/>
             <a:r>
-              <a:rPr lang="en-US" smtClean="0"/>
+              <a:rPr lang="en-US"/>
               <a:t>Fourth level</a:t>
             </a:r>
           </a:p>
           <a:p>
             <a:pPr lvl="4"/>
             <a:r>
-              <a:rPr lang="en-US" smtClean="0"/>
+              <a:rPr lang="en-US"/>
               <a:t>Fifth level</a:t>
             </a:r>
-            <a:endParaRPr lang="en-US"/>
           </a:p>
         </p:txBody>
       </p:sp>
@@ -1773,7 +1774,7 @@
           <a:p>
             <a:fld id="{5BCAD085-E8A6-8845-BD4E-CB4CCA059FC4}" type="datetimeFigureOut">
               <a:rPr lang="en-US" smtClean="0"/>
-              <a:t>1/27/13</a:t>
+              <a:t>08-Jul-26</a:t>
             </a:fld>
             <a:endParaRPr lang="en-US"/>
           </a:p>
@@ -1867,10 +1868,9 @@
           <a:lstStyle/>
           <a:p>
             <a:r>
-              <a:rPr lang="en-US" smtClean="0"/>
+              <a:rPr lang="en-US"/>
               <a:t>Click to edit Master title style</a:t>
             </a:r>
-            <a:endParaRPr lang="en-US"/>
           </a:p>
         </p:txBody>
       </p:sp>
@@ -1891,7 +1891,7 @@
           <a:p>
             <a:fld id="{5BCAD085-E8A6-8845-BD4E-CB4CCA059FC4}" type="datetimeFigureOut">
               <a:rPr lang="en-US" smtClean="0"/>
-              <a:t>1/27/13</a:t>
+              <a:t>08-Jul-26</a:t>
             </a:fld>
             <a:endParaRPr lang="en-US"/>
           </a:p>
@@ -1986,7 +1986,7 @@
           <a:p>
             <a:fld id="{5BCAD085-E8A6-8845-BD4E-CB4CCA059FC4}" type="datetimeFigureOut">
               <a:rPr lang="en-US" smtClean="0"/>
-              <a:t>1/27/13</a:t>
+              <a:t>08-Jul-26</a:t>
             </a:fld>
             <a:endParaRPr lang="en-US"/>
           </a:p>
@@ -2089,10 +2089,9 @@
           </a:lstStyle>
           <a:p>
             <a:r>
-              <a:rPr lang="en-US" smtClean="0"/>
+              <a:rPr lang="en-US"/>
               <a:t>Click to edit Master title style</a:t>
             </a:r>
-            <a:endParaRPr lang="en-US"/>
           </a:p>
         </p:txBody>
       </p:sp>
@@ -2146,38 +2145,37 @@
           <a:p>
             <a:pPr lvl="0"/>
             <a:r>
-              <a:rPr lang="en-US" smtClean="0"/>
+              <a:rPr lang="en-US"/>
               <a:t>Click to edit Master text styles</a:t>
             </a:r>
           </a:p>
           <a:p>
             <a:pPr lvl="1"/>
             <a:r>
-              <a:rPr lang="en-US" smtClean="0"/>
+              <a:rPr lang="en-US"/>
               <a:t>Second level</a:t>
             </a:r>
           </a:p>
           <a:p>
             <a:pPr lvl="2"/>
             <a:r>
-              <a:rPr lang="en-US" smtClean="0"/>
+              <a:rPr lang="en-US"/>
               <a:t>Third level</a:t>
             </a:r>
           </a:p>
           <a:p>
             <a:pPr lvl="3"/>
             <a:r>
-              <a:rPr lang="en-US" smtClean="0"/>
+              <a:rPr lang="en-US"/>
               <a:t>Fourth level</a:t>
             </a:r>
           </a:p>
           <a:p>
             <a:pPr lvl="4"/>
             <a:r>
-              <a:rPr lang="en-US" smtClean="0"/>
+              <a:rPr lang="en-US"/>
               <a:t>Fifth level</a:t>
             </a:r>
-            <a:endParaRPr lang="en-US"/>
           </a:p>
         </p:txBody>
       </p:sp>
@@ -2240,7 +2238,7 @@
           <a:p>
             <a:pPr lvl="0"/>
             <a:r>
-              <a:rPr lang="en-US" smtClean="0"/>
+              <a:rPr lang="en-US"/>
               <a:t>Click to edit Master text styles</a:t>
             </a:r>
           </a:p>
@@ -2263,7 +2261,7 @@
           <a:p>
             <a:fld id="{5BCAD085-E8A6-8845-BD4E-CB4CCA059FC4}" type="datetimeFigureOut">
               <a:rPr lang="en-US" smtClean="0"/>
-              <a:t>1/27/13</a:t>
+              <a:t>08-Jul-26</a:t>
             </a:fld>
             <a:endParaRPr lang="en-US"/>
           </a:p>
@@ -2366,10 +2364,9 @@
           </a:lstStyle>
           <a:p>
             <a:r>
-              <a:rPr lang="en-US" smtClean="0"/>
+              <a:rPr lang="en-US"/>
               <a:t>Click to edit Master title style</a:t>
             </a:r>
-            <a:endParaRPr lang="en-US"/>
           </a:p>
         </p:txBody>
       </p:sp>
@@ -2493,7 +2490,7 @@
           <a:p>
             <a:pPr lvl="0"/>
             <a:r>
-              <a:rPr lang="en-US" smtClean="0"/>
+              <a:rPr lang="en-US"/>
               <a:t>Click to edit Master text styles</a:t>
             </a:r>
           </a:p>
@@ -2516,7 +2513,7 @@
           <a:p>
             <a:fld id="{5BCAD085-E8A6-8845-BD4E-CB4CCA059FC4}" type="datetimeFigureOut">
               <a:rPr lang="en-US" smtClean="0"/>
-              <a:t>1/27/13</a:t>
+              <a:t>08-Jul-26</a:t>
             </a:fld>
             <a:endParaRPr lang="en-US"/>
           </a:p>
@@ -2625,10 +2622,9 @@
           <a:lstStyle/>
           <a:p>
             <a:r>
-              <a:rPr lang="en-US" smtClean="0"/>
+              <a:rPr lang="en-US"/>
               <a:t>Click to edit Master title style</a:t>
             </a:r>
-            <a:endParaRPr lang="en-US"/>
           </a:p>
         </p:txBody>
       </p:sp>
@@ -2659,38 +2655,37 @@
           <a:p>
             <a:pPr lvl="0"/>
             <a:r>
-              <a:rPr lang="en-US" smtClean="0"/>
+              <a:rPr lang="en-US"/>
               <a:t>Click to edit Master text styles</a:t>
             </a:r>
           </a:p>
           <a:p>
             <a:pPr lvl="1"/>
             <a:r>
-              <a:rPr lang="en-US" smtClean="0"/>
+              <a:rPr lang="en-US"/>
               <a:t>Second level</a:t>
             </a:r>
           </a:p>
           <a:p>
             <a:pPr lvl="2"/>
             <a:r>
-              <a:rPr lang="en-US" smtClean="0"/>
+              <a:rPr lang="en-US"/>
               <a:t>Third level</a:t>
             </a:r>
           </a:p>
           <a:p>
             <a:pPr lvl="3"/>
             <a:r>
-              <a:rPr lang="en-US" smtClean="0"/>
+              <a:rPr lang="en-US"/>
               <a:t>Fourth level</a:t>
             </a:r>
           </a:p>
           <a:p>
             <a:pPr lvl="4"/>
             <a:r>
-              <a:rPr lang="en-US" smtClean="0"/>
+              <a:rPr lang="en-US"/>
               <a:t>Fifth level</a:t>
             </a:r>
-            <a:endParaRPr lang="en-US"/>
           </a:p>
         </p:txBody>
       </p:sp>
@@ -2729,7 +2724,7 @@
           <a:p>
             <a:fld id="{5BCAD085-E8A6-8845-BD4E-CB4CCA059FC4}" type="datetimeFigureOut">
               <a:rPr lang="en-US" smtClean="0"/>
-              <a:t>1/27/13</a:t>
+              <a:t>08-Jul-26</a:t>
             </a:fld>
             <a:endParaRPr lang="en-US"/>
           </a:p>
@@ -3088,7 +3083,7 @@
 </file>
 
 <file path=ppt/slides/slide1.xml><?xml version="1.0" encoding="utf-8"?>
-<p:sld xmlns:a="http://schemas.openxmlformats.org/drawingml/2006/main" xmlns:p="http://schemas.openxmlformats.org/presentationml/2006/main" xmlns:r="http://schemas.openxmlformats.org/officeDocument/2006/relationships">
+<p:sld xmlns:a="http://schemas.openxmlformats.org/drawingml/2006/main" xmlns:r="http://schemas.openxmlformats.org/officeDocument/2006/relationships" xmlns:p="http://schemas.openxmlformats.org/presentationml/2006/main">
   <p:cSld>
     <p:spTree>
       <p:nvGrpSpPr>
@@ -3096,7 +3091,14 @@
         <p:cNvGrpSpPr/>
         <p:nvPr/>
       </p:nvGrpSpPr>
-      <p:grpSpPr/>
+      <p:grpSpPr>
+        <a:xfrm>
+          <a:off x="0" y="0"/>
+          <a:ext cx="0" cy="0"/>
+          <a:chOff x="0" y="0"/>
+          <a:chExt cx="0" cy="0"/>
+        </a:xfrm>
+      </p:grpSpPr>
       <p:sp>
         <p:nvSpPr>
           <p:cNvPr id="2" name="Rectangle 1"/>
@@ -3138,6 +3140,7 @@
           <a:lstStyle/>
           <a:p>
             <a:pPr algn="ctr"/>
+            <a:endParaRPr/>
           </a:p>
         </p:txBody>
       </p:sp>
@@ -3182,6 +3185,7 @@
           <a:lstStyle/>
           <a:p>
             <a:pPr algn="ctr"/>
+            <a:endParaRPr/>
           </a:p>
         </p:txBody>
       </p:sp>
@@ -3194,7 +3198,7 @@
         <p:spPr>
           <a:xfrm>
             <a:off x="640080" y="868680"/>
-            <a:ext cx="10789920" cy="365760"/>
+            <a:ext cx="3456524" cy="276999"/>
           </a:xfrm>
           <a:prstGeom prst="rect">
             <a:avLst/>
@@ -3208,13 +3212,13 @@
           <a:lstStyle/>
           <a:p>
             <a:r>
-              <a:rPr sz="1200" b="1" i="0">
+              <a:rPr sz="1200" b="1" i="0" dirty="0">
                 <a:solidFill>
                   <a:srgbClr val="0F766E"/>
                 </a:solidFill>
                 <a:latin typeface="Calibri"/>
               </a:rPr>
-              <a:t>IIITDM-SIES INTERNSHIP  |  MID-REVIEW PRESENTATION</a:t>
+              <a:t>IIITDM-SIES INTERNSHIP  |  REVIEW PRESENTATION</a:t>
             </a:r>
           </a:p>
         </p:txBody>
@@ -3331,6 +3335,7 @@
           <a:lstStyle/>
           <a:p>
             <a:pPr algn="ctr"/>
+            <a:endParaRPr/>
           </a:p>
         </p:txBody>
       </p:sp>
@@ -3343,7 +3348,7 @@
         <p:spPr>
           <a:xfrm>
             <a:off x="640080" y="4526280"/>
-            <a:ext cx="10789920" cy="1737360"/>
+            <a:ext cx="10789920" cy="1369606"/>
           </a:xfrm>
           <a:prstGeom prst="rect">
             <a:avLst/>
@@ -3355,7 +3360,9 @@
             <a:spAutoFit/>
           </a:bodyPr>
           <a:lstStyle/>
-          <a:p/>
+          <a:p>
+            <a:endParaRPr dirty="0"/>
+          </a:p>
           <a:p>
             <a:pPr>
               <a:spcAft>
@@ -3363,7 +3370,7 @@
               </a:spcAft>
             </a:pPr>
             <a:r>
-              <a:rPr sz="1100" b="1" i="0">
+              <a:rPr sz="1100" b="1" i="0" dirty="0">
                 <a:solidFill>
                   <a:srgbClr val="6B7282"/>
                 </a:solidFill>
@@ -3372,7 +3379,7 @@
               <a:t>PRESENTED BY      </a:t>
             </a:r>
             <a:r>
-              <a:rPr sz="1500" b="0" i="0">
+              <a:rPr sz="1500" b="0" i="0" dirty="0">
                 <a:solidFill>
                   <a:srgbClr val="1F2A40"/>
                 </a:solidFill>
@@ -3388,7 +3395,7 @@
               </a:spcAft>
             </a:pPr>
             <a:r>
-              <a:rPr sz="1100" b="1" i="0">
+              <a:rPr sz="1100" b="1" i="0" dirty="0">
                 <a:solidFill>
                   <a:srgbClr val="6B7282"/>
                 </a:solidFill>
@@ -3397,7 +3404,16 @@
               <a:t>INSTITUTE         </a:t>
             </a:r>
             <a:r>
-              <a:rPr sz="1500" b="0" i="0">
+              <a:rPr lang="en-US" sz="1100" b="1" i="0" dirty="0">
+                <a:solidFill>
+                  <a:srgbClr val="6B7282"/>
+                </a:solidFill>
+                <a:latin typeface="Calibri"/>
+              </a:rPr>
+              <a:t>     </a:t>
+            </a:r>
+            <a:r>
+              <a:rPr sz="1500" b="0" i="0" dirty="0">
                 <a:solidFill>
                   <a:srgbClr val="1F2A40"/>
                 </a:solidFill>
@@ -3413,7 +3429,7 @@
               </a:spcAft>
             </a:pPr>
             <a:r>
-              <a:rPr sz="1100" b="1" i="0">
+              <a:rPr sz="1100" b="1" i="0" dirty="0">
                 <a:solidFill>
                   <a:srgbClr val="6B7282"/>
                 </a:solidFill>
@@ -3422,7 +3438,16 @@
               <a:t>MENTOR            </a:t>
             </a:r>
             <a:r>
-              <a:rPr sz="1500" b="0" i="0">
+              <a:rPr lang="en-US" sz="1100" b="1" i="0" dirty="0">
+                <a:solidFill>
+                  <a:srgbClr val="6B7282"/>
+                </a:solidFill>
+                <a:latin typeface="Calibri"/>
+              </a:rPr>
+              <a:t>     </a:t>
+            </a:r>
+            <a:r>
+              <a:rPr sz="1500" b="0" i="0" dirty="0">
                 <a:solidFill>
                   <a:srgbClr val="1F2A40"/>
                 </a:solidFill>
@@ -3438,16 +3463,16 @@
               </a:spcAft>
             </a:pPr>
             <a:r>
-              <a:rPr sz="1100" b="1" i="0">
+              <a:rPr sz="1100" b="1" i="0" dirty="0">
                 <a:solidFill>
                   <a:srgbClr val="6B7282"/>
                 </a:solidFill>
                 <a:latin typeface="Calibri"/>
               </a:rPr>
-              <a:t>PROGRAMME         </a:t>
-            </a:r>
-            <a:r>
-              <a:rPr sz="1500" b="0" i="0">
+              <a:t>PROGRAMME        </a:t>
+            </a:r>
+            <a:r>
+              <a:rPr sz="1500" b="0" i="0" dirty="0">
                 <a:solidFill>
                   <a:srgbClr val="1F2A40"/>
                 </a:solidFill>
@@ -3501,7 +3526,7 @@
 </file>
 
 <file path=ppt/slides/slide10.xml><?xml version="1.0" encoding="utf-8"?>
-<p:sld xmlns:a="http://schemas.openxmlformats.org/drawingml/2006/main" xmlns:p="http://schemas.openxmlformats.org/presentationml/2006/main" xmlns:r="http://schemas.openxmlformats.org/officeDocument/2006/relationships">
+<p:sld xmlns:a="http://schemas.openxmlformats.org/drawingml/2006/main" xmlns:r="http://schemas.openxmlformats.org/officeDocument/2006/relationships" xmlns:p="http://schemas.openxmlformats.org/presentationml/2006/main">
   <p:cSld>
     <p:spTree>
       <p:nvGrpSpPr>
@@ -3509,7 +3534,14 @@
         <p:cNvGrpSpPr/>
         <p:nvPr/>
       </p:nvGrpSpPr>
-      <p:grpSpPr/>
+      <p:grpSpPr>
+        <a:xfrm>
+          <a:off x="0" y="0"/>
+          <a:ext cx="0" cy="0"/>
+          <a:chOff x="0" y="0"/>
+          <a:chExt cx="0" cy="0"/>
+        </a:xfrm>
+      </p:grpSpPr>
       <p:sp>
         <p:nvSpPr>
           <p:cNvPr id="2" name="Rectangle 1"/>
@@ -3551,6 +3583,7 @@
           <a:lstStyle/>
           <a:p>
             <a:pPr algn="ctr"/>
+            <a:endParaRPr/>
           </a:p>
         </p:txBody>
       </p:sp>
@@ -3595,6 +3628,7 @@
           <a:lstStyle/>
           <a:p>
             <a:pPr algn="ctr"/>
+            <a:endParaRPr/>
           </a:p>
         </p:txBody>
       </p:sp>
@@ -3918,16 +3952,7 @@
                 </a:solidFill>
                 <a:latin typeface="Calibri"/>
               </a:rPr>
-              <a:t>•   </a:t>
-            </a:r>
-            <a:r>
-              <a:rPr sz="1200" b="0" i="0">
-                <a:solidFill>
-                  <a:srgbClr val="1F2A40"/>
-                </a:solidFill>
-                <a:latin typeface="Calibri"/>
-              </a:rPr>
-              <a:t>Posture training and equipment review (84% at RULA action level 5+).</a:t>
+              <a:t>•   Posture training and equipment review (84% at RULA grand score 5+ (action level 3 or 4)).</a:t>
             </a:r>
           </a:p>
           <a:p>
@@ -3993,16 +4018,7 @@
                 </a:solidFill>
                 <a:latin typeface="Calibri"/>
               </a:rPr>
-              <a:t>•   </a:t>
-            </a:r>
-            <a:r>
-              <a:rPr sz="1200" b="0" i="0">
-                <a:solidFill>
-                  <a:srgbClr val="1F2A40"/>
-                </a:solidFill>
-                <a:latin typeface="Calibri"/>
-              </a:rPr>
-              <a:t>Platform-level workload management.</a:t>
+              <a:t>•   Rotate riders through high-workload shifts; watch NASA-TLX and fatigue as leading indicators.</a:t>
             </a:r>
           </a:p>
         </p:txBody>
@@ -4050,6 +4066,7 @@
           <a:lstStyle/>
           <a:p>
             <a:pPr algn="ctr"/>
+            <a:endParaRPr/>
           </a:p>
         </p:txBody>
       </p:sp>
@@ -4112,7 +4129,7 @@
           <a:p>
             <a:pPr algn="l"/>
             <a:r>
-              <a:rPr sz="1200" b="0" i="0">
+              <a:rPr sz="1200" b="0" i="0" dirty="0">
                 <a:solidFill>
                   <a:srgbClr val="1F2A40"/>
                 </a:solidFill>
@@ -4166,7 +4183,7 @@
 </file>
 
 <file path=ppt/slides/slide2.xml><?xml version="1.0" encoding="utf-8"?>
-<p:sld xmlns:a="http://schemas.openxmlformats.org/drawingml/2006/main" xmlns:p="http://schemas.openxmlformats.org/presentationml/2006/main" xmlns:r="http://schemas.openxmlformats.org/officeDocument/2006/relationships">
+<p:sld xmlns:a="http://schemas.openxmlformats.org/drawingml/2006/main" xmlns:r="http://schemas.openxmlformats.org/officeDocument/2006/relationships" xmlns:p="http://schemas.openxmlformats.org/presentationml/2006/main">
   <p:cSld>
     <p:spTree>
       <p:nvGrpSpPr>
@@ -4174,7 +4191,14 @@
         <p:cNvGrpSpPr/>
         <p:nvPr/>
       </p:nvGrpSpPr>
-      <p:grpSpPr/>
+      <p:grpSpPr>
+        <a:xfrm>
+          <a:off x="0" y="0"/>
+          <a:ext cx="0" cy="0"/>
+          <a:chOff x="0" y="0"/>
+          <a:chExt cx="0" cy="0"/>
+        </a:xfrm>
+      </p:grpSpPr>
       <p:sp>
         <p:nvSpPr>
           <p:cNvPr id="2" name="Rectangle 1"/>
@@ -4216,6 +4240,7 @@
           <a:lstStyle/>
           <a:p>
             <a:pPr algn="ctr"/>
+            <a:endParaRPr/>
           </a:p>
         </p:txBody>
       </p:sp>
@@ -4260,6 +4285,7 @@
           <a:lstStyle/>
           <a:p>
             <a:pPr algn="ctr"/>
+            <a:endParaRPr/>
           </a:p>
         </p:txBody>
       </p:sp>
@@ -4435,16 +4461,7 @@
                 </a:solidFill>
                 <a:latin typeface="Calibri"/>
               </a:rPr>
-              <a:t>•   </a:t>
-            </a:r>
-            <a:r>
-              <a:rPr sz="1400" b="0" i="0">
-                <a:solidFill>
-                  <a:srgbClr val="1F2A40"/>
-                </a:solidFill>
-                <a:latin typeface="Calibri"/>
-              </a:rPr>
-              <a:t>Build a two-stage pipeline (deterministic labels + supervised ML) that scores each rider on Force, Repetition, Posture, Duration, Contact Stress, and Vibration.</a:t>
+              <a:t>•   Combine RULA, QEC, NMQ, NASA-TLX, and Borg CR10 into per-rider labels for six risk factors (Force, Repetition, Posture, Duration, Contact Stress, Vibration).</a:t>
             </a:r>
           </a:p>
           <a:p>
@@ -4460,16 +4477,7 @@
                 </a:solidFill>
                 <a:latin typeface="Calibri"/>
               </a:rPr>
-              <a:t>•   </a:t>
-            </a:r>
-            <a:r>
-              <a:rPr sz="1400" b="0" i="0">
-                <a:solidFill>
-                  <a:srgbClr val="1F2A40"/>
-                </a:solidFill>
-                <a:latin typeface="Calibri"/>
-              </a:rPr>
-              <a:t>Train seven candidate classifiers per factor with SMOTE + GridSearchCV inside 5-fold stratified cross-validation.</a:t>
+              <a:t>•   Train a supervised classifier per factor from a 36-item rider survey plus RULA / QEC observations; report honest 5-fold CV metrics.</a:t>
             </a:r>
           </a:p>
           <a:p>
@@ -4485,16 +4493,7 @@
                 </a:solidFill>
                 <a:latin typeface="Calibri"/>
               </a:rPr>
-              <a:t>•   </a:t>
-            </a:r>
-            <a:r>
-              <a:rPr sz="1400" b="0" i="0">
-                <a:solidFill>
-                  <a:srgbClr val="1F2A40"/>
-                </a:solidFill>
-                <a:latin typeface="Calibri"/>
-              </a:rPr>
-              <a:t>Identify and correct methodological issues discovered during modelling (label leakage, boundary degeneracy in binning).</a:t>
+              <a:t>•   Deploy a Streamlit web app that returns the six colour-coded risk levels for a new rider in real time.</a:t>
             </a:r>
           </a:p>
           <a:p>
@@ -4510,16 +4509,7 @@
                 </a:solidFill>
                 <a:latin typeface="Calibri"/>
               </a:rPr>
-              <a:t>•   </a:t>
-            </a:r>
-            <a:r>
-              <a:rPr sz="1400" b="0" i="0">
-                <a:solidFill>
-                  <a:srgbClr val="1F2A40"/>
-                </a:solidFill>
-                <a:latin typeface="Calibri"/>
-              </a:rPr>
-              <a:t>Deploy an interactive Streamlit web application that accepts the full 36-item questionnaire and returns six colour-coded risk levels.</a:t>
+              <a:t>•   Surface exposure patterns platforms can act on (working hours, vehicle type, carrying mode, age cohorts).</a:t>
             </a:r>
           </a:p>
         </p:txBody>
@@ -4567,7 +4557,7 @@
 </file>
 
 <file path=ppt/slides/slide3.xml><?xml version="1.0" encoding="utf-8"?>
-<p:sld xmlns:a="http://schemas.openxmlformats.org/drawingml/2006/main" xmlns:p="http://schemas.openxmlformats.org/presentationml/2006/main" xmlns:r="http://schemas.openxmlformats.org/officeDocument/2006/relationships">
+<p:sld xmlns:a="http://schemas.openxmlformats.org/drawingml/2006/main" xmlns:r="http://schemas.openxmlformats.org/officeDocument/2006/relationships" xmlns:p="http://schemas.openxmlformats.org/presentationml/2006/main">
   <p:cSld>
     <p:spTree>
       <p:nvGrpSpPr>
@@ -4575,7 +4565,14 @@
         <p:cNvGrpSpPr/>
         <p:nvPr/>
       </p:nvGrpSpPr>
-      <p:grpSpPr/>
+      <p:grpSpPr>
+        <a:xfrm>
+          <a:off x="0" y="0"/>
+          <a:ext cx="0" cy="0"/>
+          <a:chOff x="0" y="0"/>
+          <a:chExt cx="0" cy="0"/>
+        </a:xfrm>
+      </p:grpSpPr>
       <p:sp>
         <p:nvSpPr>
           <p:cNvPr id="2" name="Rectangle 1"/>
@@ -4617,6 +4614,7 @@
           <a:lstStyle/>
           <a:p>
             <a:pPr algn="ctr"/>
+            <a:endParaRPr/>
           </a:p>
         </p:txBody>
       </p:sp>
@@ -4661,6 +4659,7 @@
           <a:lstStyle/>
           <a:p>
             <a:pPr algn="ctr"/>
+            <a:endParaRPr/>
           </a:p>
         </p:txBody>
       </p:sp>
@@ -4816,16 +4815,7 @@
                 </a:solidFill>
                 <a:latin typeface="Calibri"/>
               </a:rPr>
-              <a:t>–   </a:t>
-            </a:r>
-            <a:r>
-              <a:rPr sz="1300" b="0" i="0">
-                <a:solidFill>
-                  <a:srgbClr val="1F2A40"/>
-                </a:solidFill>
-                <a:latin typeface="Calibri"/>
-              </a:rPr>
-              <a:t>RULA action levels collapsed into three bands for Posture</a:t>
+              <a:t>–   RULA grand-score bands (1-2 / 3-4 / 5+) collapsed to three Posture labels</a:t>
             </a:r>
           </a:p>
           <a:p>
@@ -5007,7 +4997,7 @@
 </file>
 
 <file path=ppt/slides/slide4.xml><?xml version="1.0" encoding="utf-8"?>
-<p:sld xmlns:a="http://schemas.openxmlformats.org/drawingml/2006/main" xmlns:p="http://schemas.openxmlformats.org/presentationml/2006/main" xmlns:r="http://schemas.openxmlformats.org/officeDocument/2006/relationships">
+<p:sld xmlns:a="http://schemas.openxmlformats.org/drawingml/2006/main" xmlns:r="http://schemas.openxmlformats.org/officeDocument/2006/relationships" xmlns:p="http://schemas.openxmlformats.org/presentationml/2006/main">
   <p:cSld>
     <p:spTree>
       <p:nvGrpSpPr>
@@ -5015,7 +5005,14 @@
         <p:cNvGrpSpPr/>
         <p:nvPr/>
       </p:nvGrpSpPr>
-      <p:grpSpPr/>
+      <p:grpSpPr>
+        <a:xfrm>
+          <a:off x="0" y="0"/>
+          <a:ext cx="0" cy="0"/>
+          <a:chOff x="0" y="0"/>
+          <a:chExt cx="0" cy="0"/>
+        </a:xfrm>
+      </p:grpSpPr>
       <p:sp>
         <p:nvSpPr>
           <p:cNvPr id="2" name="Rectangle 1"/>
@@ -5057,6 +5054,7 @@
           <a:lstStyle/>
           <a:p>
             <a:pPr algn="ctr"/>
+            <a:endParaRPr/>
           </a:p>
         </p:txBody>
       </p:sp>
@@ -5101,6 +5099,7 @@
           <a:lstStyle/>
           <a:p>
             <a:pPr algn="ctr"/>
+            <a:endParaRPr/>
           </a:p>
         </p:txBody>
       </p:sp>
@@ -5215,6 +5214,7 @@
           <a:lstStyle/>
           <a:p>
             <a:pPr algn="ctr"/>
+            <a:endParaRPr/>
           </a:p>
         </p:txBody>
       </p:sp>
@@ -5554,6 +5554,7 @@
           <a:lstStyle/>
           <a:p>
             <a:pPr algn="ctr"/>
+            <a:endParaRPr/>
           </a:p>
         </p:txBody>
       </p:sp>
@@ -5893,7 +5894,7 @@
 </file>
 
 <file path=ppt/slides/slide5.xml><?xml version="1.0" encoding="utf-8"?>
-<p:sld xmlns:a="http://schemas.openxmlformats.org/drawingml/2006/main" xmlns:p="http://schemas.openxmlformats.org/presentationml/2006/main" xmlns:r="http://schemas.openxmlformats.org/officeDocument/2006/relationships">
+<p:sld xmlns:a="http://schemas.openxmlformats.org/drawingml/2006/main" xmlns:r="http://schemas.openxmlformats.org/officeDocument/2006/relationships" xmlns:p="http://schemas.openxmlformats.org/presentationml/2006/main">
   <p:cSld>
     <p:spTree>
       <p:nvGrpSpPr>
@@ -5901,7 +5902,14 @@
         <p:cNvGrpSpPr/>
         <p:nvPr/>
       </p:nvGrpSpPr>
-      <p:grpSpPr/>
+      <p:grpSpPr>
+        <a:xfrm>
+          <a:off x="0" y="0"/>
+          <a:ext cx="0" cy="0"/>
+          <a:chOff x="0" y="0"/>
+          <a:chExt cx="0" cy="0"/>
+        </a:xfrm>
+      </p:grpSpPr>
       <p:sp>
         <p:nvSpPr>
           <p:cNvPr id="2" name="Rectangle 1"/>
@@ -5943,6 +5951,7 @@
           <a:lstStyle/>
           <a:p>
             <a:pPr algn="ctr"/>
+            <a:endParaRPr/>
           </a:p>
         </p:txBody>
       </p:sp>
@@ -5987,6 +5996,7 @@
           <a:lstStyle/>
           <a:p>
             <a:pPr algn="ctr"/>
+            <a:endParaRPr/>
           </a:p>
         </p:txBody>
       </p:sp>
@@ -6077,12 +6087,48 @@
                 <a:tableStyleId>{5C22544A-7EE6-4342-B048-85BDC9FD1C3A}</a:tableStyleId>
               </a:tblPr>
               <a:tblGrid>
-                <a:gridCol w="1798320"/>
-                <a:gridCol w="1798320"/>
-                <a:gridCol w="1798320"/>
-                <a:gridCol w="1798320"/>
-                <a:gridCol w="1798320"/>
-                <a:gridCol w="1798320"/>
+                <a:gridCol w="1798320">
+                  <a:extLst>
+                    <a:ext uri="{9D8B030D-6E8A-4147-A177-3AD203B41FA5}">
+                      <a16:colId xmlns:a16="http://schemas.microsoft.com/office/drawing/2014/main" val="20000"/>
+                    </a:ext>
+                  </a:extLst>
+                </a:gridCol>
+                <a:gridCol w="1798320">
+                  <a:extLst>
+                    <a:ext uri="{9D8B030D-6E8A-4147-A177-3AD203B41FA5}">
+                      <a16:colId xmlns:a16="http://schemas.microsoft.com/office/drawing/2014/main" val="20001"/>
+                    </a:ext>
+                  </a:extLst>
+                </a:gridCol>
+                <a:gridCol w="1798320">
+                  <a:extLst>
+                    <a:ext uri="{9D8B030D-6E8A-4147-A177-3AD203B41FA5}">
+                      <a16:colId xmlns:a16="http://schemas.microsoft.com/office/drawing/2014/main" val="20002"/>
+                    </a:ext>
+                  </a:extLst>
+                </a:gridCol>
+                <a:gridCol w="1798320">
+                  <a:extLst>
+                    <a:ext uri="{9D8B030D-6E8A-4147-A177-3AD203B41FA5}">
+                      <a16:colId xmlns:a16="http://schemas.microsoft.com/office/drawing/2014/main" val="20003"/>
+                    </a:ext>
+                  </a:extLst>
+                </a:gridCol>
+                <a:gridCol w="1798320">
+                  <a:extLst>
+                    <a:ext uri="{9D8B030D-6E8A-4147-A177-3AD203B41FA5}">
+                      <a16:colId xmlns:a16="http://schemas.microsoft.com/office/drawing/2014/main" val="20004"/>
+                    </a:ext>
+                  </a:extLst>
+                </a:gridCol>
+                <a:gridCol w="1798320">
+                  <a:extLst>
+                    <a:ext uri="{9D8B030D-6E8A-4147-A177-3AD203B41FA5}">
+                      <a16:colId xmlns:a16="http://schemas.microsoft.com/office/drawing/2014/main" val="20005"/>
+                    </a:ext>
+                  </a:extLst>
+                </a:gridCol>
               </a:tblGrid>
               <a:tr h="457200">
                 <a:tc>
@@ -6121,7 +6167,7 @@
                           </a:solidFill>
                           <a:latin typeface="Calibri"/>
                         </a:rPr>
-                        <a:t>Method</a:t>
+                        <a:t>Signal</a:t>
                       </a:r>
                     </a:p>
                   </a:txBody>
@@ -6223,6 +6269,11 @@
                     </a:solidFill>
                   </a:tcPr>
                 </a:tc>
+                <a:extLst>
+                  <a:ext uri="{0D108BD9-81ED-4DB2-BD59-A6C34878D82A}">
+                    <a16:rowId xmlns:a16="http://schemas.microsoft.com/office/drawing/2014/main" val="10000"/>
+                  </a:ext>
+                </a:extLst>
               </a:tr>
               <a:tr h="457200">
                 <a:tc>
@@ -6261,7 +6312,7 @@
                           </a:solidFill>
                           <a:latin typeface="Calibri"/>
                         </a:rPr>
-                        <a:t>Borg CR10 (lifting)</a:t>
+                        <a:t>Borg CR10 lifting rating</a:t>
                       </a:r>
                     </a:p>
                   </a:txBody>
@@ -6284,7 +6335,7 @@
                           </a:solidFill>
                           <a:latin typeface="Calibri"/>
                         </a:rPr>
-                        <a:t>0-3 / 4-6 / 7-10 dph</a:t>
+                        <a:t>0-3 / 4-6 / 7-10 (Borg)</a:t>
                       </a:r>
                     </a:p>
                   </a:txBody>
@@ -6363,6 +6414,11 @@
                     </a:solidFill>
                   </a:tcPr>
                 </a:tc>
+                <a:extLst>
+                  <a:ext uri="{0D108BD9-81ED-4DB2-BD59-A6C34878D82A}">
+                    <a16:rowId xmlns:a16="http://schemas.microsoft.com/office/drawing/2014/main" val="10001"/>
+                  </a:ext>
+                </a:extLst>
               </a:tr>
               <a:tr h="457200">
                 <a:tc>
@@ -6401,7 +6457,7 @@
                           </a:solidFill>
                           <a:latin typeface="Calibri"/>
                         </a:rPr>
-                        <a:t>Deliveries per hour</a:t>
+                        <a:t>deliveries per hour</a:t>
                       </a:r>
                     </a:p>
                   </a:txBody>
@@ -6503,6 +6559,11 @@
                     </a:solidFill>
                   </a:tcPr>
                 </a:tc>
+                <a:extLst>
+                  <a:ext uri="{0D108BD9-81ED-4DB2-BD59-A6C34878D82A}">
+                    <a16:rowId xmlns:a16="http://schemas.microsoft.com/office/drawing/2014/main" val="10002"/>
+                  </a:ext>
+                </a:extLst>
               </a:tr>
               <a:tr h="457200">
                 <a:tc>
@@ -6541,7 +6602,7 @@
                           </a:solidFill>
                           <a:latin typeface="Calibri"/>
                         </a:rPr>
-                        <a:t>Continuous hours</a:t>
+                        <a:t>continuous work hours</a:t>
                       </a:r>
                     </a:p>
                   </a:txBody>
@@ -6643,6 +6704,11 @@
                     </a:solidFill>
                   </a:tcPr>
                 </a:tc>
+                <a:extLst>
+                  <a:ext uri="{0D108BD9-81ED-4DB2-BD59-A6C34878D82A}">
+                    <a16:rowId xmlns:a16="http://schemas.microsoft.com/office/drawing/2014/main" val="10003"/>
+                  </a:ext>
+                </a:extLst>
               </a:tr>
               <a:tr h="457200">
                 <a:tc>
@@ -6681,7 +6747,7 @@
                           </a:solidFill>
                           <a:latin typeface="Calibri"/>
                         </a:rPr>
-                        <a:t>vehicle_rank * hours</a:t>
+                        <a:t>vehicle rank x work hours</a:t>
                       </a:r>
                     </a:p>
                   </a:txBody>
@@ -6783,6 +6849,11 @@
                     </a:solidFill>
                   </a:tcPr>
                 </a:tc>
+                <a:extLst>
+                  <a:ext uri="{0D108BD9-81ED-4DB2-BD59-A6C34878D82A}">
+                    <a16:rowId xmlns:a16="http://schemas.microsoft.com/office/drawing/2014/main" val="10004"/>
+                  </a:ext>
+                </a:extLst>
               </a:tr>
               <a:tr h="457200">
                 <a:tc>
@@ -6821,7 +6892,7 @@
                           </a:solidFill>
                           <a:latin typeface="Calibri"/>
                         </a:rPr>
-                        <a:t>carry x hours x age</a:t>
+                        <a:t>carrying mode x hours x age</a:t>
                       </a:r>
                     </a:p>
                   </a:txBody>
@@ -6923,6 +6994,11 @@
                     </a:solidFill>
                   </a:tcPr>
                 </a:tc>
+                <a:extLst>
+                  <a:ext uri="{0D108BD9-81ED-4DB2-BD59-A6C34878D82A}">
+                    <a16:rowId xmlns:a16="http://schemas.microsoft.com/office/drawing/2014/main" val="10005"/>
+                  </a:ext>
+                </a:extLst>
               </a:tr>
               <a:tr h="457200">
                 <a:tc>
@@ -6961,7 +7037,7 @@
                           </a:solidFill>
                           <a:latin typeface="Calibri"/>
                         </a:rPr>
-                        <a:t>RULA Table C</a:t>
+                        <a:t>RULA Table C grand score</a:t>
                       </a:r>
                     </a:p>
                   </a:txBody>
@@ -6984,7 +7060,7 @@
                           </a:solidFill>
                           <a:latin typeface="Calibri"/>
                         </a:rPr>
-                        <a:t>1-2 / 3-4 / 5+ (AL1-4)</a:t>
+                        <a:t>grand score 1-2 / 3-4 / 5+</a:t>
                       </a:r>
                     </a:p>
                   </a:txBody>
@@ -7063,6 +7139,11 @@
                     </a:solidFill>
                   </a:tcPr>
                 </a:tc>
+                <a:extLst>
+                  <a:ext uri="{0D108BD9-81ED-4DB2-BD59-A6C34878D82A}">
+                    <a16:rowId xmlns:a16="http://schemas.microsoft.com/office/drawing/2014/main" val="10006"/>
+                  </a:ext>
+                </a:extLst>
               </a:tr>
             </a:tbl>
           </a:graphicData>
@@ -7098,7 +7179,7 @@
                 </a:solidFill>
                 <a:latin typeface="Calibri"/>
               </a:rPr>
-              <a:t>Posture, Duration, and Repetition are the three factors where the High band dominates.  Posture has no Low observations because the training-data minimum RULA Table C score is 3 (Medium).</a:t>
+              <a:t>Posture (84% High), Duration (49%), and Repetition (41%) skew heavily toward High. Posture has no Low observations because the training-data minimum RULA Table C grand score is 3 (Medium); SMOTE inside every training fold handles the resulting Stage-2 class imbalance.</a:t>
             </a:r>
           </a:p>
         </p:txBody>
@@ -7146,7 +7227,7 @@
 </file>
 
 <file path=ppt/slides/slide6.xml><?xml version="1.0" encoding="utf-8"?>
-<p:sld xmlns:a="http://schemas.openxmlformats.org/drawingml/2006/main" xmlns:p="http://schemas.openxmlformats.org/presentationml/2006/main" xmlns:r="http://schemas.openxmlformats.org/officeDocument/2006/relationships">
+<p:sld xmlns:a="http://schemas.openxmlformats.org/drawingml/2006/main" xmlns:r="http://schemas.openxmlformats.org/officeDocument/2006/relationships" xmlns:p="http://schemas.openxmlformats.org/presentationml/2006/main">
   <p:cSld>
     <p:spTree>
       <p:nvGrpSpPr>
@@ -7154,7 +7235,14 @@
         <p:cNvGrpSpPr/>
         <p:nvPr/>
       </p:nvGrpSpPr>
-      <p:grpSpPr/>
+      <p:grpSpPr>
+        <a:xfrm>
+          <a:off x="0" y="0"/>
+          <a:ext cx="0" cy="0"/>
+          <a:chOff x="0" y="0"/>
+          <a:chExt cx="0" cy="0"/>
+        </a:xfrm>
+      </p:grpSpPr>
       <p:sp>
         <p:nvSpPr>
           <p:cNvPr id="2" name="Rectangle 1"/>
@@ -7196,6 +7284,7 @@
           <a:lstStyle/>
           <a:p>
             <a:pPr algn="ctr"/>
+            <a:endParaRPr/>
           </a:p>
         </p:txBody>
       </p:sp>
@@ -7240,6 +7329,7 @@
           <a:lstStyle/>
           <a:p>
             <a:pPr algn="ctr"/>
+            <a:endParaRPr/>
           </a:p>
         </p:txBody>
       </p:sp>
@@ -7672,7 +7762,7 @@
         </p:nvGraphicFramePr>
         <p:xfrm>
           <a:off x="6766560" y="2103120"/>
-          <a:ext cx="4937760" cy="2743200"/>
+          <a:ext cx="4937760" cy="2756265"/>
         </p:xfrm>
         <a:graphic>
           <a:graphicData uri="http://schemas.openxmlformats.org/drawingml/2006/table">
@@ -7681,9 +7771,27 @@
                 <a:tableStyleId>{5C22544A-7EE6-4342-B048-85BDC9FD1C3A}</a:tableStyleId>
               </a:tblPr>
               <a:tblGrid>
-                <a:gridCol w="1645920"/>
-                <a:gridCol w="1645920"/>
-                <a:gridCol w="1645920"/>
+                <a:gridCol w="1645920">
+                  <a:extLst>
+                    <a:ext uri="{9D8B030D-6E8A-4147-A177-3AD203B41FA5}">
+                      <a16:colId xmlns:a16="http://schemas.microsoft.com/office/drawing/2014/main" val="20000"/>
+                    </a:ext>
+                  </a:extLst>
+                </a:gridCol>
+                <a:gridCol w="1645920">
+                  <a:extLst>
+                    <a:ext uri="{9D8B030D-6E8A-4147-A177-3AD203B41FA5}">
+                      <a16:colId xmlns:a16="http://schemas.microsoft.com/office/drawing/2014/main" val="20001"/>
+                    </a:ext>
+                  </a:extLst>
+                </a:gridCol>
+                <a:gridCol w="1645920">
+                  <a:extLst>
+                    <a:ext uri="{9D8B030D-6E8A-4147-A177-3AD203B41FA5}">
+                      <a16:colId xmlns:a16="http://schemas.microsoft.com/office/drawing/2014/main" val="20002"/>
+                    </a:ext>
+                  </a:extLst>
+                </a:gridCol>
               </a:tblGrid>
               <a:tr h="391885">
                 <a:tc>
@@ -7755,6 +7863,11 @@
                     </a:solidFill>
                   </a:tcPr>
                 </a:tc>
+                <a:extLst>
+                  <a:ext uri="{0D108BD9-81ED-4DB2-BD59-A6C34878D82A}">
+                    <a16:rowId xmlns:a16="http://schemas.microsoft.com/office/drawing/2014/main" val="10000"/>
+                  </a:ext>
+                </a:extLst>
               </a:tr>
               <a:tr h="391885">
                 <a:tc>
@@ -7826,6 +7939,11 @@
                     </a:solidFill>
                   </a:tcPr>
                 </a:tc>
+                <a:extLst>
+                  <a:ext uri="{0D108BD9-81ED-4DB2-BD59-A6C34878D82A}">
+                    <a16:rowId xmlns:a16="http://schemas.microsoft.com/office/drawing/2014/main" val="10001"/>
+                  </a:ext>
+                </a:extLst>
               </a:tr>
               <a:tr h="391885">
                 <a:tc>
@@ -7897,6 +8015,11 @@
                     </a:solidFill>
                   </a:tcPr>
                 </a:tc>
+                <a:extLst>
+                  <a:ext uri="{0D108BD9-81ED-4DB2-BD59-A6C34878D82A}">
+                    <a16:rowId xmlns:a16="http://schemas.microsoft.com/office/drawing/2014/main" val="10002"/>
+                  </a:ext>
+                </a:extLst>
               </a:tr>
               <a:tr h="391885">
                 <a:tc>
@@ -7968,6 +8091,11 @@
                     </a:solidFill>
                   </a:tcPr>
                 </a:tc>
+                <a:extLst>
+                  <a:ext uri="{0D108BD9-81ED-4DB2-BD59-A6C34878D82A}">
+                    <a16:rowId xmlns:a16="http://schemas.microsoft.com/office/drawing/2014/main" val="10003"/>
+                  </a:ext>
+                </a:extLst>
               </a:tr>
               <a:tr h="391885">
                 <a:tc>
@@ -8039,6 +8167,11 @@
                     </a:solidFill>
                   </a:tcPr>
                 </a:tc>
+                <a:extLst>
+                  <a:ext uri="{0D108BD9-81ED-4DB2-BD59-A6C34878D82A}">
+                    <a16:rowId xmlns:a16="http://schemas.microsoft.com/office/drawing/2014/main" val="10004"/>
+                  </a:ext>
+                </a:extLst>
               </a:tr>
               <a:tr h="391885">
                 <a:tc>
@@ -8110,6 +8243,11 @@
                     </a:solidFill>
                   </a:tcPr>
                 </a:tc>
+                <a:extLst>
+                  <a:ext uri="{0D108BD9-81ED-4DB2-BD59-A6C34878D82A}">
+                    <a16:rowId xmlns:a16="http://schemas.microsoft.com/office/drawing/2014/main" val="10005"/>
+                  </a:ext>
+                </a:extLst>
               </a:tr>
               <a:tr h="391890">
                 <a:tc>
@@ -8181,6 +8319,11 @@
                     </a:solidFill>
                   </a:tcPr>
                 </a:tc>
+                <a:extLst>
+                  <a:ext uri="{0D108BD9-81ED-4DB2-BD59-A6C34878D82A}">
+                    <a16:rowId xmlns:a16="http://schemas.microsoft.com/office/drawing/2014/main" val="10006"/>
+                  </a:ext>
+                </a:extLst>
               </a:tr>
             </a:tbl>
           </a:graphicData>
@@ -8216,7 +8359,7 @@
                 </a:solidFill>
                 <a:latin typeface="Calibri"/>
               </a:rPr>
-              <a:t>Prevents label leakage: each model has to learn from the rest of the rider profile instead of memorising the Stage-1 rule.</a:t>
+              <a:t>Each classifier must learn from the rest of the rider profile; it cannot memorise the Stage-1 rule.</a:t>
             </a:r>
           </a:p>
         </p:txBody>
@@ -8264,7 +8407,7 @@
 </file>
 
 <file path=ppt/slides/slide7.xml><?xml version="1.0" encoding="utf-8"?>
-<p:sld xmlns:a="http://schemas.openxmlformats.org/drawingml/2006/main" xmlns:p="http://schemas.openxmlformats.org/presentationml/2006/main" xmlns:r="http://schemas.openxmlformats.org/officeDocument/2006/relationships">
+<p:sld xmlns:a="http://schemas.openxmlformats.org/drawingml/2006/main" xmlns:r="http://schemas.openxmlformats.org/officeDocument/2006/relationships" xmlns:p="http://schemas.openxmlformats.org/presentationml/2006/main">
   <p:cSld>
     <p:spTree>
       <p:nvGrpSpPr>
@@ -8272,7 +8415,14 @@
         <p:cNvGrpSpPr/>
         <p:nvPr/>
       </p:nvGrpSpPr>
-      <p:grpSpPr/>
+      <p:grpSpPr>
+        <a:xfrm>
+          <a:off x="0" y="0"/>
+          <a:ext cx="0" cy="0"/>
+          <a:chOff x="0" y="0"/>
+          <a:chExt cx="0" cy="0"/>
+        </a:xfrm>
+      </p:grpSpPr>
       <p:sp>
         <p:nvSpPr>
           <p:cNvPr id="2" name="Rectangle 1"/>
@@ -8314,6 +8464,7 @@
           <a:lstStyle/>
           <a:p>
             <a:pPr algn="ctr"/>
+            <a:endParaRPr/>
           </a:p>
         </p:txBody>
       </p:sp>
@@ -8358,6 +8509,7 @@
           <a:lstStyle/>
           <a:p>
             <a:pPr algn="ctr"/>
+            <a:endParaRPr/>
           </a:p>
         </p:txBody>
       </p:sp>
@@ -8518,7 +8670,7 @@
                 </a:solidFill>
                 <a:latin typeface="Calibri"/>
               </a:rPr>
-              <a:t>Logistic regression  |  significant predictors of any 12-month pain</a:t>
+              <a:t>Logistic regression  |  top 6 of 7 significant predictors of any 12-month pain (deliveries_num also sig., OR 1.05, p 0.045)</a:t>
             </a:r>
           </a:p>
         </p:txBody>
@@ -8533,7 +8685,7 @@
         </p:nvGraphicFramePr>
         <p:xfrm>
           <a:off x="6400800" y="2148840"/>
-          <a:ext cx="5303520" cy="1828800"/>
+          <a:ext cx="5303520" cy="1963783"/>
         </p:xfrm>
         <a:graphic>
           <a:graphicData uri="http://schemas.openxmlformats.org/drawingml/2006/table">
@@ -8542,10 +8694,34 @@
                 <a:tableStyleId>{5C22544A-7EE6-4342-B048-85BDC9FD1C3A}</a:tableStyleId>
               </a:tblPr>
               <a:tblGrid>
-                <a:gridCol w="1325880"/>
-                <a:gridCol w="1325880"/>
-                <a:gridCol w="1325880"/>
-                <a:gridCol w="1325880"/>
+                <a:gridCol w="1325880">
+                  <a:extLst>
+                    <a:ext uri="{9D8B030D-6E8A-4147-A177-3AD203B41FA5}">
+                      <a16:colId xmlns:a16="http://schemas.microsoft.com/office/drawing/2014/main" val="20000"/>
+                    </a:ext>
+                  </a:extLst>
+                </a:gridCol>
+                <a:gridCol w="1325880">
+                  <a:extLst>
+                    <a:ext uri="{9D8B030D-6E8A-4147-A177-3AD203B41FA5}">
+                      <a16:colId xmlns:a16="http://schemas.microsoft.com/office/drawing/2014/main" val="20001"/>
+                    </a:ext>
+                  </a:extLst>
+                </a:gridCol>
+                <a:gridCol w="1325880">
+                  <a:extLst>
+                    <a:ext uri="{9D8B030D-6E8A-4147-A177-3AD203B41FA5}">
+                      <a16:colId xmlns:a16="http://schemas.microsoft.com/office/drawing/2014/main" val="20002"/>
+                    </a:ext>
+                  </a:extLst>
+                </a:gridCol>
+                <a:gridCol w="1325880">
+                  <a:extLst>
+                    <a:ext uri="{9D8B030D-6E8A-4147-A177-3AD203B41FA5}">
+                      <a16:colId xmlns:a16="http://schemas.microsoft.com/office/drawing/2014/main" val="20003"/>
+                    </a:ext>
+                  </a:extLst>
+                </a:gridCol>
               </a:tblGrid>
               <a:tr h="261257">
                 <a:tc>
@@ -8640,6 +8816,11 @@
                     </a:solidFill>
                   </a:tcPr>
                 </a:tc>
+                <a:extLst>
+                  <a:ext uri="{0D108BD9-81ED-4DB2-BD59-A6C34878D82A}">
+                    <a16:rowId xmlns:a16="http://schemas.microsoft.com/office/drawing/2014/main" val="10000"/>
+                  </a:ext>
+                </a:extLst>
               </a:tr>
               <a:tr h="261257">
                 <a:tc>
@@ -8734,6 +8915,11 @@
                     </a:solidFill>
                   </a:tcPr>
                 </a:tc>
+                <a:extLst>
+                  <a:ext uri="{0D108BD9-81ED-4DB2-BD59-A6C34878D82A}">
+                    <a16:rowId xmlns:a16="http://schemas.microsoft.com/office/drawing/2014/main" val="10001"/>
+                  </a:ext>
+                </a:extLst>
               </a:tr>
               <a:tr h="261257">
                 <a:tc>
@@ -8828,6 +9014,11 @@
                     </a:solidFill>
                   </a:tcPr>
                 </a:tc>
+                <a:extLst>
+                  <a:ext uri="{0D108BD9-81ED-4DB2-BD59-A6C34878D82A}">
+                    <a16:rowId xmlns:a16="http://schemas.microsoft.com/office/drawing/2014/main" val="10002"/>
+                  </a:ext>
+                </a:extLst>
               </a:tr>
               <a:tr h="261257">
                 <a:tc>
@@ -8922,6 +9113,11 @@
                     </a:solidFill>
                   </a:tcPr>
                 </a:tc>
+                <a:extLst>
+                  <a:ext uri="{0D108BD9-81ED-4DB2-BD59-A6C34878D82A}">
+                    <a16:rowId xmlns:a16="http://schemas.microsoft.com/office/drawing/2014/main" val="10003"/>
+                  </a:ext>
+                </a:extLst>
               </a:tr>
               <a:tr h="261257">
                 <a:tc>
@@ -9016,6 +9212,11 @@
                     </a:solidFill>
                   </a:tcPr>
                 </a:tc>
+                <a:extLst>
+                  <a:ext uri="{0D108BD9-81ED-4DB2-BD59-A6C34878D82A}">
+                    <a16:rowId xmlns:a16="http://schemas.microsoft.com/office/drawing/2014/main" val="10004"/>
+                  </a:ext>
+                </a:extLst>
               </a:tr>
               <a:tr h="261257">
                 <a:tc>
@@ -9110,6 +9311,11 @@
                     </a:solidFill>
                   </a:tcPr>
                 </a:tc>
+                <a:extLst>
+                  <a:ext uri="{0D108BD9-81ED-4DB2-BD59-A6C34878D82A}">
+                    <a16:rowId xmlns:a16="http://schemas.microsoft.com/office/drawing/2014/main" val="10005"/>
+                  </a:ext>
+                </a:extLst>
               </a:tr>
               <a:tr h="261258">
                 <a:tc>
@@ -9204,6 +9410,11 @@
                     </a:solidFill>
                   </a:tcPr>
                 </a:tc>
+                <a:extLst>
+                  <a:ext uri="{0D108BD9-81ED-4DB2-BD59-A6C34878D82A}">
+                    <a16:rowId xmlns:a16="http://schemas.microsoft.com/office/drawing/2014/main" val="10006"/>
+                  </a:ext>
+                </a:extLst>
               </a:tr>
             </a:tbl>
           </a:graphicData>
@@ -9254,7 +9465,7 @@
         </p:nvGraphicFramePr>
         <p:xfrm>
           <a:off x="640080" y="4572000"/>
-          <a:ext cx="5394960" cy="1508760"/>
+          <a:ext cx="5394960" cy="1706880"/>
         </p:xfrm>
         <a:graphic>
           <a:graphicData uri="http://schemas.openxmlformats.org/drawingml/2006/table">
@@ -9263,11 +9474,41 @@
                 <a:tableStyleId>{5C22544A-7EE6-4342-B048-85BDC9FD1C3A}</a:tableStyleId>
               </a:tblPr>
               <a:tblGrid>
-                <a:gridCol w="1828800"/>
-                <a:gridCol w="822960"/>
-                <a:gridCol w="548640"/>
-                <a:gridCol w="1280160"/>
-                <a:gridCol w="914400"/>
+                <a:gridCol w="1828800">
+                  <a:extLst>
+                    <a:ext uri="{9D8B030D-6E8A-4147-A177-3AD203B41FA5}">
+                      <a16:colId xmlns:a16="http://schemas.microsoft.com/office/drawing/2014/main" val="20000"/>
+                    </a:ext>
+                  </a:extLst>
+                </a:gridCol>
+                <a:gridCol w="822960">
+                  <a:extLst>
+                    <a:ext uri="{9D8B030D-6E8A-4147-A177-3AD203B41FA5}">
+                      <a16:colId xmlns:a16="http://schemas.microsoft.com/office/drawing/2014/main" val="20001"/>
+                    </a:ext>
+                  </a:extLst>
+                </a:gridCol>
+                <a:gridCol w="548640">
+                  <a:extLst>
+                    <a:ext uri="{9D8B030D-6E8A-4147-A177-3AD203B41FA5}">
+                      <a16:colId xmlns:a16="http://schemas.microsoft.com/office/drawing/2014/main" val="20002"/>
+                    </a:ext>
+                  </a:extLst>
+                </a:gridCol>
+                <a:gridCol w="1280160">
+                  <a:extLst>
+                    <a:ext uri="{9D8B030D-6E8A-4147-A177-3AD203B41FA5}">
+                      <a16:colId xmlns:a16="http://schemas.microsoft.com/office/drawing/2014/main" val="20003"/>
+                    </a:ext>
+                  </a:extLst>
+                </a:gridCol>
+                <a:gridCol w="914400">
+                  <a:extLst>
+                    <a:ext uri="{9D8B030D-6E8A-4147-A177-3AD203B41FA5}">
+                      <a16:colId xmlns:a16="http://schemas.microsoft.com/office/drawing/2014/main" val="20004"/>
+                    </a:ext>
+                  </a:extLst>
+                </a:gridCol>
               </a:tblGrid>
               <a:tr h="215537">
                 <a:tc>
@@ -9385,6 +9626,11 @@
                     </a:solidFill>
                   </a:tcPr>
                 </a:tc>
+                <a:extLst>
+                  <a:ext uri="{0D108BD9-81ED-4DB2-BD59-A6C34878D82A}">
+                    <a16:rowId xmlns:a16="http://schemas.microsoft.com/office/drawing/2014/main" val="10000"/>
+                  </a:ext>
+                </a:extLst>
               </a:tr>
               <a:tr h="215537">
                 <a:tc>
@@ -9502,6 +9748,11 @@
                     </a:solidFill>
                   </a:tcPr>
                 </a:tc>
+                <a:extLst>
+                  <a:ext uri="{0D108BD9-81ED-4DB2-BD59-A6C34878D82A}">
+                    <a16:rowId xmlns:a16="http://schemas.microsoft.com/office/drawing/2014/main" val="10001"/>
+                  </a:ext>
+                </a:extLst>
               </a:tr>
               <a:tr h="215537">
                 <a:tc>
@@ -9619,6 +9870,11 @@
                     </a:solidFill>
                   </a:tcPr>
                 </a:tc>
+                <a:extLst>
+                  <a:ext uri="{0D108BD9-81ED-4DB2-BD59-A6C34878D82A}">
+                    <a16:rowId xmlns:a16="http://schemas.microsoft.com/office/drawing/2014/main" val="10002"/>
+                  </a:ext>
+                </a:extLst>
               </a:tr>
               <a:tr h="215537">
                 <a:tc>
@@ -9736,6 +9992,11 @@
                     </a:solidFill>
                   </a:tcPr>
                 </a:tc>
+                <a:extLst>
+                  <a:ext uri="{0D108BD9-81ED-4DB2-BD59-A6C34878D82A}">
+                    <a16:rowId xmlns:a16="http://schemas.microsoft.com/office/drawing/2014/main" val="10003"/>
+                  </a:ext>
+                </a:extLst>
               </a:tr>
               <a:tr h="215537">
                 <a:tc>
@@ -9853,6 +10114,11 @@
                     </a:solidFill>
                   </a:tcPr>
                 </a:tc>
+                <a:extLst>
+                  <a:ext uri="{0D108BD9-81ED-4DB2-BD59-A6C34878D82A}">
+                    <a16:rowId xmlns:a16="http://schemas.microsoft.com/office/drawing/2014/main" val="10004"/>
+                  </a:ext>
+                </a:extLst>
               </a:tr>
               <a:tr h="215537">
                 <a:tc>
@@ -9970,6 +10236,11 @@
                     </a:solidFill>
                   </a:tcPr>
                 </a:tc>
+                <a:extLst>
+                  <a:ext uri="{0D108BD9-81ED-4DB2-BD59-A6C34878D82A}">
+                    <a16:rowId xmlns:a16="http://schemas.microsoft.com/office/drawing/2014/main" val="10005"/>
+                  </a:ext>
+                </a:extLst>
               </a:tr>
               <a:tr h="215538">
                 <a:tc>
@@ -10087,6 +10358,11 @@
                     </a:solidFill>
                   </a:tcPr>
                 </a:tc>
+                <a:extLst>
+                  <a:ext uri="{0D108BD9-81ED-4DB2-BD59-A6C34878D82A}">
+                    <a16:rowId xmlns:a16="http://schemas.microsoft.com/office/drawing/2014/main" val="10006"/>
+                  </a:ext>
+                </a:extLst>
               </a:tr>
             </a:tbl>
           </a:graphicData>
@@ -10122,7 +10398,7 @@
                 </a:solidFill>
                 <a:latin typeface="Calibri"/>
               </a:rPr>
-              <a:t>Mann-Whitney U  |  predictors of 7-day discomfort</a:t>
+              <a:t>Mann-Whitney U  |  predictors of 12-month pain</a:t>
             </a:r>
           </a:p>
         </p:txBody>
@@ -10137,7 +10413,7 @@
         </p:nvGraphicFramePr>
         <p:xfrm>
           <a:off x="6400800" y="4572000"/>
-          <a:ext cx="5303520" cy="1508760"/>
+          <a:ext cx="5303520" cy="1706880"/>
         </p:xfrm>
         <a:graphic>
           <a:graphicData uri="http://schemas.openxmlformats.org/drawingml/2006/table">
@@ -10146,11 +10422,41 @@
                 <a:tableStyleId>{5C22544A-7EE6-4342-B048-85BDC9FD1C3A}</a:tableStyleId>
               </a:tblPr>
               <a:tblGrid>
-                <a:gridCol w="1920240"/>
-                <a:gridCol w="822960"/>
-                <a:gridCol w="731520"/>
-                <a:gridCol w="914400"/>
-                <a:gridCol w="914400"/>
+                <a:gridCol w="1920240">
+                  <a:extLst>
+                    <a:ext uri="{9D8B030D-6E8A-4147-A177-3AD203B41FA5}">
+                      <a16:colId xmlns:a16="http://schemas.microsoft.com/office/drawing/2014/main" val="20000"/>
+                    </a:ext>
+                  </a:extLst>
+                </a:gridCol>
+                <a:gridCol w="822960">
+                  <a:extLst>
+                    <a:ext uri="{9D8B030D-6E8A-4147-A177-3AD203B41FA5}">
+                      <a16:colId xmlns:a16="http://schemas.microsoft.com/office/drawing/2014/main" val="20001"/>
+                    </a:ext>
+                  </a:extLst>
+                </a:gridCol>
+                <a:gridCol w="731520">
+                  <a:extLst>
+                    <a:ext uri="{9D8B030D-6E8A-4147-A177-3AD203B41FA5}">
+                      <a16:colId xmlns:a16="http://schemas.microsoft.com/office/drawing/2014/main" val="20002"/>
+                    </a:ext>
+                  </a:extLst>
+                </a:gridCol>
+                <a:gridCol w="914400">
+                  <a:extLst>
+                    <a:ext uri="{9D8B030D-6E8A-4147-A177-3AD203B41FA5}">
+                      <a16:colId xmlns:a16="http://schemas.microsoft.com/office/drawing/2014/main" val="20003"/>
+                    </a:ext>
+                  </a:extLst>
+                </a:gridCol>
+                <a:gridCol w="914400">
+                  <a:extLst>
+                    <a:ext uri="{9D8B030D-6E8A-4147-A177-3AD203B41FA5}">
+                      <a16:colId xmlns:a16="http://schemas.microsoft.com/office/drawing/2014/main" val="20004"/>
+                    </a:ext>
+                  </a:extLst>
+                </a:gridCol>
               </a:tblGrid>
               <a:tr h="215537">
                 <a:tc>
@@ -10268,6 +10574,11 @@
                     </a:solidFill>
                   </a:tcPr>
                 </a:tc>
+                <a:extLst>
+                  <a:ext uri="{0D108BD9-81ED-4DB2-BD59-A6C34878D82A}">
+                    <a16:rowId xmlns:a16="http://schemas.microsoft.com/office/drawing/2014/main" val="10000"/>
+                  </a:ext>
+                </a:extLst>
               </a:tr>
               <a:tr h="215537">
                 <a:tc>
@@ -10385,6 +10696,11 @@
                     </a:solidFill>
                   </a:tcPr>
                 </a:tc>
+                <a:extLst>
+                  <a:ext uri="{0D108BD9-81ED-4DB2-BD59-A6C34878D82A}">
+                    <a16:rowId xmlns:a16="http://schemas.microsoft.com/office/drawing/2014/main" val="10001"/>
+                  </a:ext>
+                </a:extLst>
               </a:tr>
               <a:tr h="215537">
                 <a:tc>
@@ -10502,6 +10818,11 @@
                     </a:solidFill>
                   </a:tcPr>
                 </a:tc>
+                <a:extLst>
+                  <a:ext uri="{0D108BD9-81ED-4DB2-BD59-A6C34878D82A}">
+                    <a16:rowId xmlns:a16="http://schemas.microsoft.com/office/drawing/2014/main" val="10002"/>
+                  </a:ext>
+                </a:extLst>
               </a:tr>
               <a:tr h="215537">
                 <a:tc>
@@ -10619,6 +10940,11 @@
                     </a:solidFill>
                   </a:tcPr>
                 </a:tc>
+                <a:extLst>
+                  <a:ext uri="{0D108BD9-81ED-4DB2-BD59-A6C34878D82A}">
+                    <a16:rowId xmlns:a16="http://schemas.microsoft.com/office/drawing/2014/main" val="10003"/>
+                  </a:ext>
+                </a:extLst>
               </a:tr>
               <a:tr h="215537">
                 <a:tc>
@@ -10736,6 +11062,11 @@
                     </a:solidFill>
                   </a:tcPr>
                 </a:tc>
+                <a:extLst>
+                  <a:ext uri="{0D108BD9-81ED-4DB2-BD59-A6C34878D82A}">
+                    <a16:rowId xmlns:a16="http://schemas.microsoft.com/office/drawing/2014/main" val="10004"/>
+                  </a:ext>
+                </a:extLst>
               </a:tr>
               <a:tr h="215537">
                 <a:tc>
@@ -10853,6 +11184,11 @@
                     </a:solidFill>
                   </a:tcPr>
                 </a:tc>
+                <a:extLst>
+                  <a:ext uri="{0D108BD9-81ED-4DB2-BD59-A6C34878D82A}">
+                    <a16:rowId xmlns:a16="http://schemas.microsoft.com/office/drawing/2014/main" val="10005"/>
+                  </a:ext>
+                </a:extLst>
               </a:tr>
               <a:tr h="215538">
                 <a:tc>
@@ -10970,6 +11306,11 @@
                     </a:solidFill>
                   </a:tcPr>
                 </a:tc>
+                <a:extLst>
+                  <a:ext uri="{0D108BD9-81ED-4DB2-BD59-A6C34878D82A}">
+                    <a16:rowId xmlns:a16="http://schemas.microsoft.com/office/drawing/2014/main" val="10006"/>
+                  </a:ext>
+                </a:extLst>
               </a:tr>
             </a:tbl>
           </a:graphicData>
@@ -11005,7 +11346,7 @@
                 </a:solidFill>
                 <a:latin typeface="Calibri"/>
               </a:rPr>
-              <a:t>Posture, Repetition, and Force reach chi-square significance;  age, tenure, income, workload, and fatigue drive it at the individual level.</a:t>
+              <a:t>Posture, Repetition, and Force reach chi-square significance; age (OR 3.58) and job duration (OR 2.89) are the strongest individual predictors, alongside income, workload, and fatigue.</a:t>
             </a:r>
           </a:p>
         </p:txBody>
@@ -11053,7 +11394,7 @@
 </file>
 
 <file path=ppt/slides/slide8.xml><?xml version="1.0" encoding="utf-8"?>
-<p:sld xmlns:a="http://schemas.openxmlformats.org/drawingml/2006/main" xmlns:p="http://schemas.openxmlformats.org/presentationml/2006/main" xmlns:r="http://schemas.openxmlformats.org/officeDocument/2006/relationships">
+<p:sld xmlns:a="http://schemas.openxmlformats.org/drawingml/2006/main" xmlns:r="http://schemas.openxmlformats.org/officeDocument/2006/relationships" xmlns:p="http://schemas.openxmlformats.org/presentationml/2006/main">
   <p:cSld>
     <p:spTree>
       <p:nvGrpSpPr>
@@ -11061,7 +11402,14 @@
         <p:cNvGrpSpPr/>
         <p:nvPr/>
       </p:nvGrpSpPr>
-      <p:grpSpPr/>
+      <p:grpSpPr>
+        <a:xfrm>
+          <a:off x="0" y="0"/>
+          <a:ext cx="0" cy="0"/>
+          <a:chOff x="0" y="0"/>
+          <a:chExt cx="0" cy="0"/>
+        </a:xfrm>
+      </p:grpSpPr>
       <p:sp>
         <p:nvSpPr>
           <p:cNvPr id="2" name="Rectangle 1"/>
@@ -11103,6 +11451,7 @@
           <a:lstStyle/>
           <a:p>
             <a:pPr algn="ctr"/>
+            <a:endParaRPr/>
           </a:p>
         </p:txBody>
       </p:sp>
@@ -11147,6 +11496,7 @@
           <a:lstStyle/>
           <a:p>
             <a:pPr algn="ctr"/>
+            <a:endParaRPr/>
           </a:p>
         </p:txBody>
       </p:sp>
@@ -11237,12 +11587,48 @@
                 <a:tableStyleId>{5C22544A-7EE6-4342-B048-85BDC9FD1C3A}</a:tableStyleId>
               </a:tblPr>
               <a:tblGrid>
-                <a:gridCol w="1798320"/>
-                <a:gridCol w="1798320"/>
-                <a:gridCol w="1798320"/>
-                <a:gridCol w="1798320"/>
-                <a:gridCol w="1798320"/>
-                <a:gridCol w="1798320"/>
+                <a:gridCol w="1798320">
+                  <a:extLst>
+                    <a:ext uri="{9D8B030D-6E8A-4147-A177-3AD203B41FA5}">
+                      <a16:colId xmlns:a16="http://schemas.microsoft.com/office/drawing/2014/main" val="20000"/>
+                    </a:ext>
+                  </a:extLst>
+                </a:gridCol>
+                <a:gridCol w="1798320">
+                  <a:extLst>
+                    <a:ext uri="{9D8B030D-6E8A-4147-A177-3AD203B41FA5}">
+                      <a16:colId xmlns:a16="http://schemas.microsoft.com/office/drawing/2014/main" val="20001"/>
+                    </a:ext>
+                  </a:extLst>
+                </a:gridCol>
+                <a:gridCol w="1798320">
+                  <a:extLst>
+                    <a:ext uri="{9D8B030D-6E8A-4147-A177-3AD203B41FA5}">
+                      <a16:colId xmlns:a16="http://schemas.microsoft.com/office/drawing/2014/main" val="20002"/>
+                    </a:ext>
+                  </a:extLst>
+                </a:gridCol>
+                <a:gridCol w="1798320">
+                  <a:extLst>
+                    <a:ext uri="{9D8B030D-6E8A-4147-A177-3AD203B41FA5}">
+                      <a16:colId xmlns:a16="http://schemas.microsoft.com/office/drawing/2014/main" val="20003"/>
+                    </a:ext>
+                  </a:extLst>
+                </a:gridCol>
+                <a:gridCol w="1798320">
+                  <a:extLst>
+                    <a:ext uri="{9D8B030D-6E8A-4147-A177-3AD203B41FA5}">
+                      <a16:colId xmlns:a16="http://schemas.microsoft.com/office/drawing/2014/main" val="20004"/>
+                    </a:ext>
+                  </a:extLst>
+                </a:gridCol>
+                <a:gridCol w="1798320">
+                  <a:extLst>
+                    <a:ext uri="{9D8B030D-6E8A-4147-A177-3AD203B41FA5}">
+                      <a16:colId xmlns:a16="http://schemas.microsoft.com/office/drawing/2014/main" val="20005"/>
+                    </a:ext>
+                  </a:extLst>
+                </a:gridCol>
               </a:tblGrid>
               <a:tr h="444137">
                 <a:tc>
@@ -11383,6 +11769,11 @@
                     </a:solidFill>
                   </a:tcPr>
                 </a:tc>
+                <a:extLst>
+                  <a:ext uri="{0D108BD9-81ED-4DB2-BD59-A6C34878D82A}">
+                    <a16:rowId xmlns:a16="http://schemas.microsoft.com/office/drawing/2014/main" val="10000"/>
+                  </a:ext>
+                </a:extLst>
               </a:tr>
               <a:tr h="444137">
                 <a:tc>
@@ -11523,6 +11914,11 @@
                     </a:solidFill>
                   </a:tcPr>
                 </a:tc>
+                <a:extLst>
+                  <a:ext uri="{0D108BD9-81ED-4DB2-BD59-A6C34878D82A}">
+                    <a16:rowId xmlns:a16="http://schemas.microsoft.com/office/drawing/2014/main" val="10001"/>
+                  </a:ext>
+                </a:extLst>
               </a:tr>
               <a:tr h="444137">
                 <a:tc>
@@ -11663,6 +12059,11 @@
                     </a:solidFill>
                   </a:tcPr>
                 </a:tc>
+                <a:extLst>
+                  <a:ext uri="{0D108BD9-81ED-4DB2-BD59-A6C34878D82A}">
+                    <a16:rowId xmlns:a16="http://schemas.microsoft.com/office/drawing/2014/main" val="10002"/>
+                  </a:ext>
+                </a:extLst>
               </a:tr>
               <a:tr h="444137">
                 <a:tc>
@@ -11803,6 +12204,11 @@
                     </a:solidFill>
                   </a:tcPr>
                 </a:tc>
+                <a:extLst>
+                  <a:ext uri="{0D108BD9-81ED-4DB2-BD59-A6C34878D82A}">
+                    <a16:rowId xmlns:a16="http://schemas.microsoft.com/office/drawing/2014/main" val="10003"/>
+                  </a:ext>
+                </a:extLst>
               </a:tr>
               <a:tr h="444137">
                 <a:tc>
@@ -11943,6 +12349,11 @@
                     </a:solidFill>
                   </a:tcPr>
                 </a:tc>
+                <a:extLst>
+                  <a:ext uri="{0D108BD9-81ED-4DB2-BD59-A6C34878D82A}">
+                    <a16:rowId xmlns:a16="http://schemas.microsoft.com/office/drawing/2014/main" val="10004"/>
+                  </a:ext>
+                </a:extLst>
               </a:tr>
               <a:tr h="444137">
                 <a:tc>
@@ -12083,6 +12494,11 @@
                     </a:solidFill>
                   </a:tcPr>
                 </a:tc>
+                <a:extLst>
+                  <a:ext uri="{0D108BD9-81ED-4DB2-BD59-A6C34878D82A}">
+                    <a16:rowId xmlns:a16="http://schemas.microsoft.com/office/drawing/2014/main" val="10005"/>
+                  </a:ext>
+                </a:extLst>
               </a:tr>
               <a:tr h="444138">
                 <a:tc>
@@ -12223,6 +12639,11 @@
                     </a:solidFill>
                   </a:tcPr>
                 </a:tc>
+                <a:extLst>
+                  <a:ext uri="{0D108BD9-81ED-4DB2-BD59-A6C34878D82A}">
+                    <a16:rowId xmlns:a16="http://schemas.microsoft.com/office/drawing/2014/main" val="10006"/>
+                  </a:ext>
+                </a:extLst>
               </a:tr>
             </a:tbl>
           </a:graphicData>
@@ -12258,7 +12679,7 @@
                 </a:solidFill>
                 <a:latin typeface="Calibri"/>
               </a:rPr>
-              <a:t>The five survey-derived factors land at 58-62% accuracy with macro AUC 71-76%.  Posture reaches 97% / 98% because it is the only model that receives real observation inputs (11 RULA components + 8 QEC scores) on top of the survey features.</a:t>
+              <a:t>The five survey-derived factors land at 58-62% CV accuracy with macro AUC 71-76%, modest but honest on n = 182. Posture jumps to 97% / 98% because it is the only factor that receives real observation inputs (11 RULA components + 8 QEC scores) on top of the survey features; the observation-vs-self-report gap is the story here.</a:t>
             </a:r>
           </a:p>
         </p:txBody>
@@ -12306,7 +12727,7 @@
 </file>
 
 <file path=ppt/slides/slide9.xml><?xml version="1.0" encoding="utf-8"?>
-<p:sld xmlns:a="http://schemas.openxmlformats.org/drawingml/2006/main" xmlns:p="http://schemas.openxmlformats.org/presentationml/2006/main" xmlns:r="http://schemas.openxmlformats.org/officeDocument/2006/relationships">
+<p:sld xmlns:a="http://schemas.openxmlformats.org/drawingml/2006/main" xmlns:r="http://schemas.openxmlformats.org/officeDocument/2006/relationships" xmlns:p="http://schemas.openxmlformats.org/presentationml/2006/main">
   <p:cSld>
     <p:spTree>
       <p:nvGrpSpPr>
@@ -12314,7 +12735,14 @@
         <p:cNvGrpSpPr/>
         <p:nvPr/>
       </p:nvGrpSpPr>
-      <p:grpSpPr/>
+      <p:grpSpPr>
+        <a:xfrm>
+          <a:off x="0" y="0"/>
+          <a:ext cx="0" cy="0"/>
+          <a:chOff x="0" y="0"/>
+          <a:chExt cx="0" cy="0"/>
+        </a:xfrm>
+      </p:grpSpPr>
       <p:sp>
         <p:nvSpPr>
           <p:cNvPr id="2" name="Rectangle 1"/>
@@ -12356,6 +12784,7 @@
           <a:lstStyle/>
           <a:p>
             <a:pPr algn="ctr"/>
+            <a:endParaRPr/>
           </a:p>
         </p:txBody>
       </p:sp>
@@ -12400,6 +12829,7 @@
           <a:lstStyle/>
           <a:p>
             <a:pPr algn="ctr"/>
+            <a:endParaRPr/>
           </a:p>
         </p:txBody>
       </p:sp>

--- a/deck/Review_Presentation.pptx
+++ b/deck/Review_Presentation.pptx
@@ -3952,7 +3952,7 @@
                 </a:solidFill>
                 <a:latin typeface="Calibri"/>
               </a:rPr>
-              <a:t>•   Posture training and equipment review (84% at RULA grand score 5+ (action level 3 or 4)).</a:t>
+              <a:t>•   Posture training and equipment review (84% at RULA grand score 5+, action level 3 or 4).</a:t>
             </a:r>
           </a:p>
           <a:p>
@@ -5397,7 +5397,7 @@
                 </a:solidFill>
                 <a:latin typeface="Calibri"/>
               </a:rPr>
-              <a:t>–   </a:t>
+              <a:t>–   Q19: 7-day discomfort (neck, lower back, wrist/hands, knees)</a:t>
             </a:r>
             <a:r>
               <a:rPr sz="1200" b="0" i="0">
@@ -5406,7 +5406,7 @@
                 </a:solidFill>
                 <a:latin typeface="Calibri"/>
               </a:rPr>
-              <a:t>Q19: 7-day discomfort (4 areas)</a:t>
+              <a:t/>
             </a:r>
           </a:p>
           <a:p>

--- a/deck/Review_Presentation.pptx
+++ b/deck/Review_Presentation.pptx
@@ -311,7 +311,7 @@
           <a:p>
             <a:fld id="{5BCAD085-E8A6-8845-BD4E-CB4CCA059FC4}" type="datetimeFigureOut">
               <a:rPr lang="en-US" smtClean="0"/>
-              <a:t>08-Jul-26</a:t>
+              <a:t>10-Jul-26</a:t>
             </a:fld>
             <a:endParaRPr lang="en-US"/>
           </a:p>
@@ -479,7 +479,7 @@
           <a:p>
             <a:fld id="{5BCAD085-E8A6-8845-BD4E-CB4CCA059FC4}" type="datetimeFigureOut">
               <a:rPr lang="en-US" smtClean="0"/>
-              <a:t>08-Jul-26</a:t>
+              <a:t>10-Jul-26</a:t>
             </a:fld>
             <a:endParaRPr lang="en-US"/>
           </a:p>
@@ -657,7 +657,7 @@
           <a:p>
             <a:fld id="{5BCAD085-E8A6-8845-BD4E-CB4CCA059FC4}" type="datetimeFigureOut">
               <a:rPr lang="en-US" smtClean="0"/>
-              <a:t>08-Jul-26</a:t>
+              <a:t>10-Jul-26</a:t>
             </a:fld>
             <a:endParaRPr lang="en-US"/>
           </a:p>
@@ -825,7 +825,7 @@
           <a:p>
             <a:fld id="{5BCAD085-E8A6-8845-BD4E-CB4CCA059FC4}" type="datetimeFigureOut">
               <a:rPr lang="en-US" smtClean="0"/>
-              <a:t>08-Jul-26</a:t>
+              <a:t>10-Jul-26</a:t>
             </a:fld>
             <a:endParaRPr lang="en-US"/>
           </a:p>
@@ -1070,7 +1070,7 @@
           <a:p>
             <a:fld id="{5BCAD085-E8A6-8845-BD4E-CB4CCA059FC4}" type="datetimeFigureOut">
               <a:rPr lang="en-US" smtClean="0"/>
-              <a:t>08-Jul-26</a:t>
+              <a:t>10-Jul-26</a:t>
             </a:fld>
             <a:endParaRPr lang="en-US"/>
           </a:p>
@@ -1355,7 +1355,7 @@
           <a:p>
             <a:fld id="{5BCAD085-E8A6-8845-BD4E-CB4CCA059FC4}" type="datetimeFigureOut">
               <a:rPr lang="en-US" smtClean="0"/>
-              <a:t>08-Jul-26</a:t>
+              <a:t>10-Jul-26</a:t>
             </a:fld>
             <a:endParaRPr lang="en-US"/>
           </a:p>
@@ -1774,7 +1774,7 @@
           <a:p>
             <a:fld id="{5BCAD085-E8A6-8845-BD4E-CB4CCA059FC4}" type="datetimeFigureOut">
               <a:rPr lang="en-US" smtClean="0"/>
-              <a:t>08-Jul-26</a:t>
+              <a:t>10-Jul-26</a:t>
             </a:fld>
             <a:endParaRPr lang="en-US"/>
           </a:p>
@@ -1891,7 +1891,7 @@
           <a:p>
             <a:fld id="{5BCAD085-E8A6-8845-BD4E-CB4CCA059FC4}" type="datetimeFigureOut">
               <a:rPr lang="en-US" smtClean="0"/>
-              <a:t>08-Jul-26</a:t>
+              <a:t>10-Jul-26</a:t>
             </a:fld>
             <a:endParaRPr lang="en-US"/>
           </a:p>
@@ -1986,7 +1986,7 @@
           <a:p>
             <a:fld id="{5BCAD085-E8A6-8845-BD4E-CB4CCA059FC4}" type="datetimeFigureOut">
               <a:rPr lang="en-US" smtClean="0"/>
-              <a:t>08-Jul-26</a:t>
+              <a:t>10-Jul-26</a:t>
             </a:fld>
             <a:endParaRPr lang="en-US"/>
           </a:p>
@@ -2261,7 +2261,7 @@
           <a:p>
             <a:fld id="{5BCAD085-E8A6-8845-BD4E-CB4CCA059FC4}" type="datetimeFigureOut">
               <a:rPr lang="en-US" smtClean="0"/>
-              <a:t>08-Jul-26</a:t>
+              <a:t>10-Jul-26</a:t>
             </a:fld>
             <a:endParaRPr lang="en-US"/>
           </a:p>
@@ -2513,7 +2513,7 @@
           <a:p>
             <a:fld id="{5BCAD085-E8A6-8845-BD4E-CB4CCA059FC4}" type="datetimeFigureOut">
               <a:rPr lang="en-US" smtClean="0"/>
-              <a:t>08-Jul-26</a:t>
+              <a:t>10-Jul-26</a:t>
             </a:fld>
             <a:endParaRPr lang="en-US"/>
           </a:p>
@@ -2724,7 +2724,7 @@
           <a:p>
             <a:fld id="{5BCAD085-E8A6-8845-BD4E-CB4CCA059FC4}" type="datetimeFigureOut">
               <a:rPr lang="en-US" smtClean="0"/>
-              <a:t>08-Jul-26</a:t>
+              <a:t>10-Jul-26</a:t>
             </a:fld>
             <a:endParaRPr lang="en-US"/>
           </a:p>
@@ -4387,7 +4387,7 @@
                 </a:solidFill>
                 <a:latin typeface="Calibri"/>
               </a:rPr>
-              <a:t>Last-mile quick-commerce delivery riders (Blinkit, Zepto) face prolonged awkward postures, high delivery rates, heavy carrying loads and vehicle vibration, leading to musculoskeletal disorders (MSDs). No single tool combines the six standard ergonomic risk factors into an automated per-rider screening.</a:t>
+              <a:t>India's 10-minute delivery boom runs on riders whose bodies quietly pay the price. Every shift is 8+ hours on the bike, heavy packages on the stairs, awkward postures in stop-and-go traffic, and constant vibration, all on the clock set by the platform's routing algorithm. Trip after trip, day after day, the exposure adds up as back pain, shoulder pain, wrist injuries, and knee problems long before the rider reports them. Yet no single screening tool measures a rider's risk across all six standard ergonomic factors (Force, Repetition, Posture, Duration, Contact Stress, Vibration) from one questionnaire.</a:t>
             </a:r>
           </a:p>
         </p:txBody>
@@ -4436,7 +4436,7 @@
         <p:spPr>
           <a:xfrm>
             <a:off x="640080" y="3749039"/>
-            <a:ext cx="10789920" cy="2468880"/>
+            <a:ext cx="10789920" cy="1615827"/>
           </a:xfrm>
           <a:prstGeom prst="rect">
             <a:avLst/>
@@ -4455,13 +4455,13 @@
               </a:spcAft>
             </a:pPr>
             <a:r>
-              <a:rPr sz="1400" b="1" i="0">
+              <a:rPr sz="1400" b="1" i="0" dirty="0">
                 <a:solidFill>
                   <a:srgbClr val="0F766E"/>
                 </a:solidFill>
                 <a:latin typeface="Calibri"/>
               </a:rPr>
-              <a:t>•   Combine RULA, QEC, NMQ, NASA-TLX, and Borg CR10 into per-rider labels for six risk factors (Force, Repetition, Posture, Duration, Contact Stress, Vibration).</a:t>
+              <a:t>•   Combine standard ergonomic methods (RULA, QEC, NMQ, NASA-TLX, Borg CR10) into per-rider Low / Medium / High labels for the six standard risk factors: Force, Repetition, Posture, Duration, Contact Stress, and Vibration.</a:t>
             </a:r>
           </a:p>
           <a:p>
@@ -4471,13 +4471,13 @@
               </a:spcAft>
             </a:pPr>
             <a:r>
-              <a:rPr sz="1400" b="1" i="0">
+              <a:rPr sz="1400" b="1" i="0" dirty="0">
                 <a:solidFill>
                   <a:srgbClr val="0F766E"/>
                 </a:solidFill>
                 <a:latin typeface="Calibri"/>
               </a:rPr>
-              <a:t>•   Train a supervised classifier per factor from a 36-item rider survey plus RULA / QEC observations; report honest 5-fold CV metrics.</a:t>
+              <a:t>•   Train an ML model per factor on the 36-item rider survey plus the RULA and QEC observation set, tuned via 5-fold stratified cross-validation with SMOTE, and report per-target accuracy, macro F1, and macro AUC.</a:t>
             </a:r>
           </a:p>
           <a:p>
@@ -4487,13 +4487,13 @@
               </a:spcAft>
             </a:pPr>
             <a:r>
-              <a:rPr sz="1400" b="1" i="0">
+              <a:rPr sz="1400" b="1" i="0" dirty="0">
                 <a:solidFill>
                   <a:srgbClr val="0F766E"/>
                 </a:solidFill>
                 <a:latin typeface="Calibri"/>
               </a:rPr>
-              <a:t>•   Deploy a Streamlit web app that returns the six colour-coded risk levels for a new rider in real time.</a:t>
+              <a:t>•   Deploy a Streamlit web app that accepts a new rider's questionnaire (plus RULA and QEC scores) and returns colour-coded Low / Medium / High predictions across the six factors in real time.</a:t>
             </a:r>
           </a:p>
           <a:p>
@@ -4503,13 +4503,13 @@
               </a:spcAft>
             </a:pPr>
             <a:r>
-              <a:rPr sz="1400" b="1" i="0">
+              <a:rPr sz="1400" b="1" i="0" dirty="0">
                 <a:solidFill>
                   <a:srgbClr val="0F766E"/>
                 </a:solidFill>
                 <a:latin typeface="Calibri"/>
               </a:rPr>
-              <a:t>•   Surface exposure patterns platforms can act on (working hours, vehicle type, carrying mode, age cohorts).</a:t>
+              <a:t>•   Translate the analysis into platform-level actions on working hours, vehicle type, carrying mode, and age-cohort screening.</a:t>
             </a:r>
           </a:p>
         </p:txBody>
@@ -4799,7 +4799,7 @@
                 </a:solidFill>
                 <a:latin typeface="Calibri"/>
               </a:rPr>
-              <a:t>Borg CR10 operational thresholds for Force</a:t>
+              <a:t>Force: Borg CR10 lifting rating (0-3 / 4-6 / 7-10).</a:t>
             </a:r>
           </a:p>
           <a:p>
@@ -4815,7 +4815,16 @@
                 </a:solidFill>
                 <a:latin typeface="Calibri"/>
               </a:rPr>
-              <a:t>–   RULA grand-score bands (1-2 / 3-4 / 5+) collapsed to three Posture labels</a:t>
+              <a:t>–   </a:t>
+            </a:r>
+            <a:r>
+              <a:rPr sz="1300" b="0" i="0">
+                <a:solidFill>
+                  <a:srgbClr val="1F2A40"/>
+                </a:solidFill>
+                <a:latin typeface="Calibri"/>
+              </a:rPr>
+              <a:t>Posture: RULA grand-score bands (1-2 / 3-4 / 5+); the High band merges Action Levels 3 and 4.</a:t>
             </a:r>
           </a:p>
           <a:p>
@@ -4840,7 +4849,32 @@
                 </a:solidFill>
                 <a:latin typeface="Calibri"/>
               </a:rPr>
-              <a:t>Fixed cuts / sample terciles for the remaining four</a:t>
+              <a:t>Duration: continuous work hours (&lt;=5 / 6-7 / &gt;7).</a:t>
+            </a:r>
+          </a:p>
+          <a:p>
+            <a:pPr lvl="1" algn="l">
+              <a:spcAft>
+                <a:spcPts val="600"/>
+              </a:spcAft>
+            </a:pPr>
+            <a:r>
+              <a:rPr sz="1300" b="1" i="0">
+                <a:solidFill>
+                  <a:srgbClr val="0F766E"/>
+                </a:solidFill>
+                <a:latin typeface="Calibri"/>
+              </a:rPr>
+              <a:t>–   </a:t>
+            </a:r>
+            <a:r>
+              <a:rPr sz="1300" b="0" i="0">
+                <a:solidFill>
+                  <a:srgbClr val="1F2A40"/>
+                </a:solidFill>
+                <a:latin typeface="Calibri"/>
+              </a:rPr>
+              <a:t>Repetition, Vibration, and Contact Stress: fixed cuts and sample terciles.</a:t>
             </a:r>
           </a:p>
           <a:p>
@@ -4865,7 +4899,7 @@
                 </a:solidFill>
                 <a:latin typeface="Calibri"/>
               </a:rPr>
-              <a:t>Stage 2 (supervised ML).  A classifier per factor learns the Stage-1 label from the rider profile, with per-target exclusions to prevent trivial leakage.</a:t>
+              <a:t>Stage 2 (supervised ML).  One model per factor learns the Stage-1 label from the rider profile. Inputs used to define the label are excluded so the model cannot just memorise the rule.</a:t>
             </a:r>
           </a:p>
           <a:p>
@@ -4890,7 +4924,7 @@
                 </a:solidFill>
                 <a:latin typeface="Calibri"/>
               </a:rPr>
-              <a:t>Two-stage split lets an ergonomist audit Stage 1 by hand, independently of the ML review.</a:t>
+              <a:t>Trained models run behind a Streamlit form so a new rider gets predictions in seconds.</a:t>
             </a:r>
           </a:p>
         </p:txBody>
@@ -4911,8 +4945,8 @@
         </p:blipFill>
         <p:spPr>
           <a:xfrm>
-            <a:off x="6949440" y="2103120"/>
-            <a:ext cx="5029200" cy="1850478"/>
+            <a:off x="6536179" y="2103120"/>
+            <a:ext cx="5442461" cy="2002536"/>
           </a:xfrm>
           <a:prstGeom prst="rect">
             <a:avLst/>
@@ -5398,15 +5432,6 @@
                 <a:latin typeface="Calibri"/>
               </a:rPr>
               <a:t>–   Q19: 7-day discomfort (neck, lower back, wrist/hands, knees)</a:t>
-            </a:r>
-            <a:r>
-              <a:rPr sz="1200" b="0" i="0">
-                <a:solidFill>
-                  <a:srgbClr val="1F2A40"/>
-                </a:solidFill>
-                <a:latin typeface="Calibri"/>
-              </a:rPr>
-              <a:t/>
             </a:r>
           </a:p>
           <a:p>
@@ -6283,13 +6308,36 @@
                     <a:p>
                       <a:pPr algn="l"/>
                       <a:r>
+                        <a:rPr sz="1200" b="0" i="0" dirty="0">
+                          <a:solidFill>
+                            <a:srgbClr val="1F2A40"/>
+                          </a:solidFill>
+                          <a:latin typeface="Calibri"/>
+                        </a:rPr>
+                        <a:t>Force</a:t>
+                      </a:r>
+                    </a:p>
+                  </a:txBody>
+                  <a:tcPr>
+                    <a:solidFill>
+                      <a:srgbClr val="FFFFFF"/>
+                    </a:solidFill>
+                  </a:tcPr>
+                </a:tc>
+                <a:tc>
+                  <a:txBody>
+                    <a:bodyPr/>
+                    <a:lstStyle/>
+                    <a:p>
+                      <a:pPr algn="l"/>
+                      <a:r>
                         <a:rPr sz="1200" b="0" i="0">
                           <a:solidFill>
                             <a:srgbClr val="1F2A40"/>
                           </a:solidFill>
                           <a:latin typeface="Calibri"/>
                         </a:rPr>
-                        <a:t>Force</a:t>
+                        <a:t>Borg CR10 lifting rating</a:t>
                       </a:r>
                     </a:p>
                   </a:txBody>
@@ -6312,7 +6360,7 @@
                           </a:solidFill>
                           <a:latin typeface="Calibri"/>
                         </a:rPr>
-                        <a:t>Borg CR10 lifting rating</a:t>
+                        <a:t>0-3 / 4-6 / 7-10 (Borg)</a:t>
                       </a:r>
                     </a:p>
                   </a:txBody>
@@ -6329,30 +6377,7 @@
                     <a:p>
                       <a:pPr algn="l"/>
                       <a:r>
-                        <a:rPr sz="1200" b="0" i="0">
-                          <a:solidFill>
-                            <a:srgbClr val="1F2A40"/>
-                          </a:solidFill>
-                          <a:latin typeface="Calibri"/>
-                        </a:rPr>
-                        <a:t>0-3 / 4-6 / 7-10 (Borg)</a:t>
-                      </a:r>
-                    </a:p>
-                  </a:txBody>
-                  <a:tcPr>
-                    <a:solidFill>
-                      <a:srgbClr val="FFFFFF"/>
-                    </a:solidFill>
-                  </a:tcPr>
-                </a:tc>
-                <a:tc>
-                  <a:txBody>
-                    <a:bodyPr/>
-                    <a:lstStyle/>
-                    <a:p>
-                      <a:pPr algn="l"/>
-                      <a:r>
-                        <a:rPr sz="1200" b="0" i="0">
+                        <a:rPr sz="1200" b="0" i="0" dirty="0">
                           <a:solidFill>
                             <a:srgbClr val="1F2A40"/>
                           </a:solidFill>
@@ -6451,7 +6476,7 @@
                     <a:p>
                       <a:pPr algn="l"/>
                       <a:r>
-                        <a:rPr sz="1200" b="0" i="0">
+                        <a:rPr sz="1200" b="0" i="0" dirty="0">
                           <a:solidFill>
                             <a:srgbClr val="1F2A40"/>
                           </a:solidFill>
@@ -6596,7 +6621,7 @@
                     <a:p>
                       <a:pPr algn="l"/>
                       <a:r>
-                        <a:rPr sz="1200" b="0" i="0">
+                        <a:rPr sz="1200" b="0" i="0" dirty="0">
                           <a:solidFill>
                             <a:srgbClr val="1F2A40"/>
                           </a:solidFill>
@@ -6741,7 +6766,7 @@
                     <a:p>
                       <a:pPr algn="l"/>
                       <a:r>
-                        <a:rPr sz="1200" b="0" i="0">
+                        <a:rPr sz="1200" b="0" i="0" dirty="0">
                           <a:solidFill>
                             <a:srgbClr val="1F2A40"/>
                           </a:solidFill>
@@ -7123,7 +7148,7 @@
                     <a:p>
                       <a:pPr algn="l"/>
                       <a:r>
-                        <a:rPr sz="1200" b="0" i="0">
+                        <a:rPr sz="1200" b="0" i="0" dirty="0">
                           <a:solidFill>
                             <a:srgbClr val="1F2A40"/>
                           </a:solidFill>
@@ -7431,7 +7456,7 @@
                 </a:solidFill>
                 <a:latin typeface="Calibri"/>
               </a:rPr>
-              <a:t>Seven candidate classifiers</a:t>
+              <a:t>Seven ML models tried</a:t>
             </a:r>
           </a:p>
         </p:txBody>
@@ -7479,7 +7504,7 @@
                 </a:solidFill>
                 <a:latin typeface="Calibri"/>
               </a:rPr>
-              <a:t>Logistic Regression (L2, balanced weights)</a:t>
+              <a:t>Logistic Regression (baseline linear model)</a:t>
             </a:r>
           </a:p>
           <a:p>
@@ -7504,7 +7529,7 @@
                 </a:solidFill>
                 <a:latin typeface="Calibri"/>
               </a:rPr>
-              <a:t>Decision Tree, Random Forest, Extra Trees</a:t>
+              <a:t>Decision Tree, Random Forest, Extra Trees (tree-based)</a:t>
             </a:r>
           </a:p>
           <a:p>
@@ -7529,7 +7554,7 @@
                 </a:solidFill>
                 <a:latin typeface="Calibri"/>
               </a:rPr>
-              <a:t>Hist Gradient Boosting, XGBoost</a:t>
+              <a:t>Histogram Gradient Boosting, XGBoost (boosted trees)</a:t>
             </a:r>
           </a:p>
           <a:p>
@@ -7554,7 +7579,7 @@
                 </a:solidFill>
                 <a:latin typeface="Calibri"/>
               </a:rPr>
-              <a:t>Stacking Classifier (RF + ET + XGB + HGB)</a:t>
+              <a:t>Stacking Classifier (blends the four tree/boosted models with LR on top)</a:t>
             </a:r>
           </a:p>
         </p:txBody>
@@ -7567,7 +7592,7 @@
         </p:nvSpPr>
         <p:spPr>
           <a:xfrm>
-            <a:off x="640080" y="4114800"/>
+            <a:off x="640080" y="3566160"/>
             <a:ext cx="5760720" cy="365760"/>
           </a:xfrm>
           <a:prstGeom prst="rect">
@@ -7583,13 +7608,13 @@
           <a:p>
             <a:pPr algn="l"/>
             <a:r>
-              <a:rPr sz="1500" b="1" i="0">
+              <a:rPr sz="1500" b="1" i="0" dirty="0">
                 <a:solidFill>
                   <a:srgbClr val="0F1F3A"/>
                 </a:solidFill>
                 <a:latin typeface="Calibri"/>
               </a:rPr>
-              <a:t>Cross-validation and tuning</a:t>
+              <a:t>How each model is trained</a:t>
             </a:r>
           </a:p>
         </p:txBody>
@@ -7602,7 +7627,7 @@
         </p:nvSpPr>
         <p:spPr>
           <a:xfrm>
-            <a:off x="640080" y="4526280"/>
+            <a:off x="640080" y="3959352"/>
             <a:ext cx="5760720" cy="1828800"/>
           </a:xfrm>
           <a:prstGeom prst="rect">
@@ -7622,7 +7647,7 @@
               </a:spcAft>
             </a:pPr>
             <a:r>
-              <a:rPr sz="1300" b="1" i="0">
+              <a:rPr sz="1300" b="1" i="0" dirty="0">
                 <a:solidFill>
                   <a:srgbClr val="0F766E"/>
                 </a:solidFill>
@@ -7631,13 +7656,13 @@
               <a:t>•   </a:t>
             </a:r>
             <a:r>
-              <a:rPr sz="1300" b="0" i="0">
+              <a:rPr sz="1300" b="0" i="0" dirty="0">
                 <a:solidFill>
                   <a:srgbClr val="1F2A40"/>
                 </a:solidFill>
                 <a:latin typeface="Calibri"/>
               </a:rPr>
-              <a:t>StratifiedKFold(5, shuffle=True, random_state=42)</a:t>
+              <a:t>5-fold cross-validation: the data is split into 5 slices; each model trains on 4 and is tested on the 5th, rotating through all 5.</a:t>
             </a:r>
           </a:p>
           <a:p>
@@ -7647,7 +7672,7 @@
               </a:spcAft>
             </a:pPr>
             <a:r>
-              <a:rPr sz="1300" b="1" i="0">
+              <a:rPr sz="1300" b="1" i="0" dirty="0">
                 <a:solidFill>
                   <a:srgbClr val="0F766E"/>
                 </a:solidFill>
@@ -7656,13 +7681,13 @@
               <a:t>•   </a:t>
             </a:r>
             <a:r>
-              <a:rPr sz="1300" b="0" i="0">
+              <a:rPr sz="1300" b="0" i="0" dirty="0">
                 <a:solidFill>
                   <a:srgbClr val="1F2A40"/>
                 </a:solidFill>
                 <a:latin typeface="Calibri"/>
               </a:rPr>
-              <a:t>SMOTE inside every training fold (imblearn.Pipeline)</a:t>
+              <a:t>SMOTE up-samples rare risk levels inside each training fold only, never on the test data, so evaluation stays honest.</a:t>
             </a:r>
           </a:p>
           <a:p>
@@ -7672,7 +7697,7 @@
               </a:spcAft>
             </a:pPr>
             <a:r>
-              <a:rPr sz="1300" b="1" i="0">
+              <a:rPr sz="1300" b="1" i="0" dirty="0">
                 <a:solidFill>
                   <a:srgbClr val="0F766E"/>
                 </a:solidFill>
@@ -7681,13 +7706,13 @@
               <a:t>•   </a:t>
             </a:r>
             <a:r>
-              <a:rPr sz="1300" b="0" i="0">
+              <a:rPr sz="1300" b="0" i="0" dirty="0">
                 <a:solidFill>
                   <a:srgbClr val="1F2A40"/>
                 </a:solidFill>
                 <a:latin typeface="Calibri"/>
               </a:rPr>
-              <a:t>GridSearchCV on macro F1 for hyperparameters</a:t>
+              <a:t>Grid search picks the best hyperparameters using macro F1 (average across Low / Medium / High).</a:t>
             </a:r>
           </a:p>
           <a:p>
@@ -7697,7 +7722,7 @@
               </a:spcAft>
             </a:pPr>
             <a:r>
-              <a:rPr sz="1300" b="1" i="0">
+              <a:rPr sz="1300" b="1" i="0" dirty="0">
                 <a:solidFill>
                   <a:srgbClr val="0F766E"/>
                 </a:solidFill>
@@ -7706,13 +7731,31 @@
               <a:t>•   </a:t>
             </a:r>
             <a:r>
-              <a:rPr sz="1300" b="0" i="0">
+              <a:rPr sz="1300" b="0" i="0" dirty="0">
                 <a:solidFill>
                   <a:srgbClr val="1F2A40"/>
                 </a:solidFill>
                 <a:latin typeface="Calibri"/>
               </a:rPr>
-              <a:t>Best model per target refit on full sample and saved as .pkl</a:t>
+              <a:t>The winning model is re-trained on the full sample and saved as a .</a:t>
+            </a:r>
+            <a:r>
+              <a:rPr sz="1300" b="0" i="0" dirty="0" err="1">
+                <a:solidFill>
+                  <a:srgbClr val="1F2A40"/>
+                </a:solidFill>
+                <a:latin typeface="Calibri"/>
+              </a:rPr>
+              <a:t>pkl</a:t>
+            </a:r>
+            <a:r>
+              <a:rPr sz="1300" b="0" i="0" dirty="0">
+                <a:solidFill>
+                  <a:srgbClr val="1F2A40"/>
+                </a:solidFill>
+                <a:latin typeface="Calibri"/>
+              </a:rPr>
+              <a:t> file for the web app.</a:t>
             </a:r>
           </a:p>
         </p:txBody>
@@ -7741,7 +7784,7 @@
           <a:p>
             <a:pPr algn="l"/>
             <a:r>
-              <a:rPr sz="1500" b="1" i="0">
+              <a:rPr sz="1500" b="1" i="0" dirty="0">
                 <a:solidFill>
                   <a:srgbClr val="0F1F3A"/>
                 </a:solidFill>
@@ -9428,7 +9471,7 @@
         </p:nvSpPr>
         <p:spPr>
           <a:xfrm>
-            <a:off x="640080" y="4160520"/>
+            <a:off x="640080" y="3977639"/>
             <a:ext cx="5394960" cy="320040"/>
           </a:xfrm>
           <a:prstGeom prst="rect">
@@ -9464,8 +9507,8 @@
           <p:nvPr/>
         </p:nvGraphicFramePr>
         <p:xfrm>
-          <a:off x="640080" y="4572000"/>
-          <a:ext cx="5394960" cy="1706880"/>
+          <a:off x="640080" y="4343400"/>
+          <a:ext cx="5394960" cy="1600200"/>
         </p:xfrm>
         <a:graphic>
           <a:graphicData uri="http://schemas.openxmlformats.org/drawingml/2006/table">
@@ -10376,7 +10419,7 @@
         </p:nvSpPr>
         <p:spPr>
           <a:xfrm>
-            <a:off x="6400800" y="4160520"/>
+            <a:off x="6400800" y="3977639"/>
             <a:ext cx="5303520" cy="320040"/>
           </a:xfrm>
           <a:prstGeom prst="rect">
@@ -10412,8 +10455,8 @@
           <p:nvPr/>
         </p:nvGraphicFramePr>
         <p:xfrm>
-          <a:off x="6400800" y="4572000"/>
-          <a:ext cx="5303520" cy="1706880"/>
+          <a:off x="6400800" y="4343400"/>
+          <a:ext cx="5303520" cy="1600200"/>
         </p:xfrm>
         <a:graphic>
           <a:graphicData uri="http://schemas.openxmlformats.org/drawingml/2006/table">
@@ -11324,8 +11367,8 @@
         </p:nvSpPr>
         <p:spPr>
           <a:xfrm>
-            <a:off x="640080" y="6172200"/>
-            <a:ext cx="11064240" cy="228600"/>
+            <a:off x="640080" y="6080760"/>
+            <a:ext cx="11064240" cy="274320"/>
           </a:xfrm>
           <a:prstGeom prst="rect">
             <a:avLst/>
